--- a/slides/CSC336-Lecture-16-Introduction-to-Server-Side-Programming.pptx
+++ b/slides/CSC336-Lecture-16-Introduction-to-Server-Side-Programming.pptx
@@ -3637,79 +3637,44 @@
       </p:sp>
       <p:sp>
         <p:nvSpPr>
-          <p:cNvPr id="6" name="Text 4"/>
-          <p:cNvSpPr txBox="1"/>
-          <p:nvPr/>
-        </p:nvSpPr>
-        <p:spPr>
-          <a:xfrm>
-            <a:off x="640080" y="6446520"/>
-            <a:ext cx="8686800" cy="292608"/>
-          </a:xfrm>
-          <a:prstGeom prst="rect">
-            <a:avLst/>
-          </a:prstGeom>
-          <a:noFill/>
-          <a:ln/>
-        </p:spPr>
-        <p:txBody>
-          <a:bodyPr wrap="square" lIns="0" tIns="0" rIns="0" bIns="0" rtlCol="0" anchor="ctr"/>
-          <a:lstStyle/>
-          <a:p>
-            <a:pPr algn="l" indent="0" marL="0">
-              <a:buNone/>
-            </a:pPr>
-            <a:r>
-              <a:rPr lang="en-US" sz="900" dirty="0">
-                <a:solidFill>
-                  <a:srgbClr val="9AA3D8"/>
-                </a:solidFill>
-                <a:latin typeface="Calibri" pitchFamily="34" charset="0"/>
-                <a:ea typeface="Calibri" pitchFamily="34" charset="-122"/>
-                <a:cs typeface="Calibri" pitchFamily="34" charset="-120"/>
-              </a:rPr>
-              <a:t>Usman Akram  •  COMSATS University Islamabad</a:t>
-            </a:r>
-            <a:endParaRPr lang="en-US" sz="900" dirty="0"/>
-          </a:p>
-        </p:txBody>
-      </p:sp>
-      <p:sp>
-        <p:nvSpPr>
-          <p:cNvPr id="7" name="Text 5"/>
-          <p:cNvSpPr txBox="1"/>
-          <p:nvPr/>
-        </p:nvSpPr>
-        <p:spPr>
-          <a:xfrm>
-            <a:off x="11155680" y="6446520"/>
-            <a:ext cx="457200" cy="292608"/>
-          </a:xfrm>
-          <a:prstGeom prst="rect">
-            <a:avLst/>
-          </a:prstGeom>
-          <a:noFill/>
-          <a:ln/>
-        </p:spPr>
-        <p:txBody>
-          <a:bodyPr wrap="square" lIns="0" tIns="0" rIns="0" bIns="0" rtlCol="0" anchor="ctr"/>
-          <a:lstStyle/>
-          <a:p>
-            <a:pPr algn="r" indent="0" marL="0">
-              <a:buNone/>
-            </a:pPr>
-            <a:r>
-              <a:rPr lang="en-US" sz="900" dirty="0">
-                <a:solidFill>
-                  <a:srgbClr val="9AA3D8"/>
-                </a:solidFill>
-                <a:latin typeface="Calibri" pitchFamily="34" charset="0"/>
-                <a:ea typeface="Calibri" pitchFamily="34" charset="-122"/>
-                <a:cs typeface="Calibri" pitchFamily="34" charset="-120"/>
-              </a:rPr>
-              <a:t>1</a:t>
-            </a:r>
-            <a:endParaRPr lang="en-US" sz="900" dirty="0"/>
+          <p:cNvPr id="8" name="cuinotes-footer-mark"/>
+          <p:cNvSpPr txBox="1"/>
+          <p:nvPr/>
+        </p:nvSpPr>
+        <p:spPr>
+          <a:xfrm>
+            <a:off x="9951720" y="6455664"/>
+            <a:ext cx="2011680" cy="292608"/>
+          </a:xfrm>
+          <a:prstGeom prst="rect">
+            <a:avLst/>
+          </a:prstGeom>
+          <a:noFill/>
+        </p:spPr>
+        <p:txBody>
+          <a:bodyPr wrap="none" lIns="0" rIns="0" tIns="0" bIns="0">
+            <a:spAutoFit/>
+          </a:bodyPr>
+          <a:lstStyle/>
+          <a:p>
+            <a:pPr algn="r"/>
+            <a:r>
+              <a:rPr sz="1000">
+                <a:solidFill>
+                  <a:srgbClr val="8A939B"/>
+                </a:solidFill>
+                <a:hlinkClick r:id="rId3"/>
+              </a:rPr>
+              <a:t>cuinotes.com</a:t>
+            </a:r>
+            <a:r>
+              <a:rPr sz="1000">
+                <a:solidFill>
+                  <a:srgbClr val="8A939B"/>
+                </a:solidFill>
+              </a:rPr>
+              <a:t>  ·  1</a:t>
+            </a:r>
           </a:p>
         </p:txBody>
       </p:sp>
@@ -3842,6 +3807,10 @@
           </a:solidFill>
           <a:ln/>
         </p:spPr>
+        <p:txBody>
+          <a:bodyPr/>
+          <a:p/>
+        </p:txBody>
       </p:sp>
       <p:sp>
         <p:nvSpPr>
@@ -3940,6 +3909,10 @@
           </a:solidFill>
           <a:ln/>
         </p:spPr>
+        <p:txBody>
+          <a:bodyPr/>
+          <a:p/>
+        </p:txBody>
       </p:sp>
       <p:sp>
         <p:nvSpPr>
@@ -4038,6 +4011,10 @@
           </a:solidFill>
           <a:ln/>
         </p:spPr>
+        <p:txBody>
+          <a:bodyPr/>
+          <a:p/>
+        </p:txBody>
       </p:sp>
       <p:sp>
         <p:nvSpPr>
@@ -4136,6 +4113,10 @@
           </a:solidFill>
           <a:ln/>
         </p:spPr>
+        <p:txBody>
+          <a:bodyPr/>
+          <a:p/>
+        </p:txBody>
       </p:sp>
       <p:sp>
         <p:nvSpPr>
@@ -4217,79 +4198,44 @@
       </p:sp>
       <p:sp>
         <p:nvSpPr>
-          <p:cNvPr id="16" name="Text 14"/>
-          <p:cNvSpPr txBox="1"/>
-          <p:nvPr/>
-        </p:nvSpPr>
-        <p:spPr>
-          <a:xfrm>
-            <a:off x="640080" y="6446520"/>
-            <a:ext cx="8686800" cy="292608"/>
-          </a:xfrm>
-          <a:prstGeom prst="rect">
-            <a:avLst/>
-          </a:prstGeom>
-          <a:noFill/>
-          <a:ln/>
-        </p:spPr>
-        <p:txBody>
-          <a:bodyPr wrap="square" lIns="0" tIns="0" rIns="0" bIns="0" rtlCol="0" anchor="ctr"/>
-          <a:lstStyle/>
-          <a:p>
-            <a:pPr algn="l" indent="0" marL="0">
-              <a:buNone/>
-            </a:pPr>
-            <a:r>
-              <a:rPr lang="en-US" sz="900" dirty="0">
-                <a:solidFill>
-                  <a:srgbClr val="5D5D72"/>
-                </a:solidFill>
-                <a:latin typeface="Calibri" pitchFamily="34" charset="0"/>
-                <a:ea typeface="Calibri" pitchFamily="34" charset="-122"/>
-                <a:cs typeface="Calibri" pitchFamily="34" charset="-120"/>
-              </a:rPr>
-              <a:t>Usman Akram  •  COMSATS University Islamabad</a:t>
-            </a:r>
-            <a:endParaRPr lang="en-US" sz="900" dirty="0"/>
-          </a:p>
-        </p:txBody>
-      </p:sp>
-      <p:sp>
-        <p:nvSpPr>
-          <p:cNvPr id="17" name="Text 15"/>
-          <p:cNvSpPr txBox="1"/>
-          <p:nvPr/>
-        </p:nvSpPr>
-        <p:spPr>
-          <a:xfrm>
-            <a:off x="11155680" y="6446520"/>
-            <a:ext cx="457200" cy="292608"/>
-          </a:xfrm>
-          <a:prstGeom prst="rect">
-            <a:avLst/>
-          </a:prstGeom>
-          <a:noFill/>
-          <a:ln/>
-        </p:spPr>
-        <p:txBody>
-          <a:bodyPr wrap="square" lIns="0" tIns="0" rIns="0" bIns="0" rtlCol="0" anchor="ctr"/>
-          <a:lstStyle/>
-          <a:p>
-            <a:pPr algn="r" indent="0" marL="0">
-              <a:buNone/>
-            </a:pPr>
-            <a:r>
-              <a:rPr lang="en-US" sz="900" dirty="0">
-                <a:solidFill>
-                  <a:srgbClr val="5D5D72"/>
-                </a:solidFill>
-                <a:latin typeface="Calibri" pitchFamily="34" charset="0"/>
-                <a:ea typeface="Calibri" pitchFamily="34" charset="-122"/>
-                <a:cs typeface="Calibri" pitchFamily="34" charset="-120"/>
-              </a:rPr>
-              <a:t>10</a:t>
-            </a:r>
-            <a:endParaRPr lang="en-US" sz="900" dirty="0"/>
+          <p:cNvPr id="18" name="cuinotes-footer-mark"/>
+          <p:cNvSpPr txBox="1"/>
+          <p:nvPr/>
+        </p:nvSpPr>
+        <p:spPr>
+          <a:xfrm>
+            <a:off x="9951720" y="6455664"/>
+            <a:ext cx="2011680" cy="292608"/>
+          </a:xfrm>
+          <a:prstGeom prst="rect">
+            <a:avLst/>
+          </a:prstGeom>
+          <a:noFill/>
+        </p:spPr>
+        <p:txBody>
+          <a:bodyPr wrap="none" lIns="0" rIns="0" tIns="0" bIns="0">
+            <a:spAutoFit/>
+          </a:bodyPr>
+          <a:lstStyle/>
+          <a:p>
+            <a:pPr algn="r"/>
+            <a:r>
+              <a:rPr sz="1000">
+                <a:solidFill>
+                  <a:srgbClr val="8A939B"/>
+                </a:solidFill>
+                <a:hlinkClick r:id="rId3"/>
+              </a:rPr>
+              <a:t>cuinotes.com</a:t>
+            </a:r>
+            <a:r>
+              <a:rPr sz="1000">
+                <a:solidFill>
+                  <a:srgbClr val="8A939B"/>
+                </a:solidFill>
+              </a:rPr>
+              <a:t>  ·  10</a:t>
+            </a:r>
           </a:p>
         </p:txBody>
       </p:sp>
@@ -4422,6 +4368,10 @@
           </a:solidFill>
           <a:ln/>
         </p:spPr>
+        <p:txBody>
+          <a:bodyPr/>
+          <a:p/>
+        </p:txBody>
       </p:sp>
       <p:sp>
         <p:nvSpPr>
@@ -4520,6 +4470,10 @@
           </a:solidFill>
           <a:ln/>
         </p:spPr>
+        <p:txBody>
+          <a:bodyPr/>
+          <a:p/>
+        </p:txBody>
       </p:sp>
       <p:sp>
         <p:nvSpPr>
@@ -4618,6 +4572,10 @@
           </a:solidFill>
           <a:ln/>
         </p:spPr>
+        <p:txBody>
+          <a:bodyPr/>
+          <a:p/>
+        </p:txBody>
       </p:sp>
       <p:sp>
         <p:nvSpPr>
@@ -4699,79 +4657,44 @@
       </p:sp>
       <p:sp>
         <p:nvSpPr>
-          <p:cNvPr id="13" name="Text 11"/>
-          <p:cNvSpPr txBox="1"/>
-          <p:nvPr/>
-        </p:nvSpPr>
-        <p:spPr>
-          <a:xfrm>
-            <a:off x="640080" y="6446520"/>
-            <a:ext cx="8686800" cy="292608"/>
-          </a:xfrm>
-          <a:prstGeom prst="rect">
-            <a:avLst/>
-          </a:prstGeom>
-          <a:noFill/>
-          <a:ln/>
-        </p:spPr>
-        <p:txBody>
-          <a:bodyPr wrap="square" lIns="0" tIns="0" rIns="0" bIns="0" rtlCol="0" anchor="ctr"/>
-          <a:lstStyle/>
-          <a:p>
-            <a:pPr algn="l" indent="0" marL="0">
-              <a:buNone/>
-            </a:pPr>
-            <a:r>
-              <a:rPr lang="en-US" sz="900" dirty="0">
-                <a:solidFill>
-                  <a:srgbClr val="5D5D72"/>
-                </a:solidFill>
-                <a:latin typeface="Calibri" pitchFamily="34" charset="0"/>
-                <a:ea typeface="Calibri" pitchFamily="34" charset="-122"/>
-                <a:cs typeface="Calibri" pitchFamily="34" charset="-120"/>
-              </a:rPr>
-              <a:t>Usman Akram  •  COMSATS University Islamabad</a:t>
-            </a:r>
-            <a:endParaRPr lang="en-US" sz="900" dirty="0"/>
-          </a:p>
-        </p:txBody>
-      </p:sp>
-      <p:sp>
-        <p:nvSpPr>
-          <p:cNvPr id="14" name="Text 12"/>
-          <p:cNvSpPr txBox="1"/>
-          <p:nvPr/>
-        </p:nvSpPr>
-        <p:spPr>
-          <a:xfrm>
-            <a:off x="11155680" y="6446520"/>
-            <a:ext cx="457200" cy="292608"/>
-          </a:xfrm>
-          <a:prstGeom prst="rect">
-            <a:avLst/>
-          </a:prstGeom>
-          <a:noFill/>
-          <a:ln/>
-        </p:spPr>
-        <p:txBody>
-          <a:bodyPr wrap="square" lIns="0" tIns="0" rIns="0" bIns="0" rtlCol="0" anchor="ctr"/>
-          <a:lstStyle/>
-          <a:p>
-            <a:pPr algn="r" indent="0" marL="0">
-              <a:buNone/>
-            </a:pPr>
-            <a:r>
-              <a:rPr lang="en-US" sz="900" dirty="0">
-                <a:solidFill>
-                  <a:srgbClr val="5D5D72"/>
-                </a:solidFill>
-                <a:latin typeface="Calibri" pitchFamily="34" charset="0"/>
-                <a:ea typeface="Calibri" pitchFamily="34" charset="-122"/>
-                <a:cs typeface="Calibri" pitchFamily="34" charset="-120"/>
-              </a:rPr>
-              <a:t>11</a:t>
-            </a:r>
-            <a:endParaRPr lang="en-US" sz="900" dirty="0"/>
+          <p:cNvPr id="15" name="cuinotes-footer-mark"/>
+          <p:cNvSpPr txBox="1"/>
+          <p:nvPr/>
+        </p:nvSpPr>
+        <p:spPr>
+          <a:xfrm>
+            <a:off x="9951720" y="6455664"/>
+            <a:ext cx="2011680" cy="292608"/>
+          </a:xfrm>
+          <a:prstGeom prst="rect">
+            <a:avLst/>
+          </a:prstGeom>
+          <a:noFill/>
+        </p:spPr>
+        <p:txBody>
+          <a:bodyPr wrap="none" lIns="0" rIns="0" tIns="0" bIns="0">
+            <a:spAutoFit/>
+          </a:bodyPr>
+          <a:lstStyle/>
+          <a:p>
+            <a:pPr algn="r"/>
+            <a:r>
+              <a:rPr sz="1000">
+                <a:solidFill>
+                  <a:srgbClr val="8A939B"/>
+                </a:solidFill>
+                <a:hlinkClick r:id="rId3"/>
+              </a:rPr>
+              <a:t>cuinotes.com</a:t>
+            </a:r>
+            <a:r>
+              <a:rPr sz="1000">
+                <a:solidFill>
+                  <a:srgbClr val="8A939B"/>
+                </a:solidFill>
+              </a:rPr>
+              <a:t>  ·  11</a:t>
+            </a:r>
           </a:p>
         </p:txBody>
       </p:sp>
@@ -4904,6 +4827,10 @@
           </a:solidFill>
           <a:ln/>
         </p:spPr>
+        <p:txBody>
+          <a:bodyPr/>
+          <a:p/>
+        </p:txBody>
       </p:sp>
       <p:sp>
         <p:nvSpPr>
@@ -5002,6 +4929,10 @@
           </a:solidFill>
           <a:ln/>
         </p:spPr>
+        <p:txBody>
+          <a:bodyPr/>
+          <a:p/>
+        </p:txBody>
       </p:sp>
       <p:sp>
         <p:nvSpPr>
@@ -5100,6 +5031,10 @@
           </a:solidFill>
           <a:ln/>
         </p:spPr>
+        <p:txBody>
+          <a:bodyPr/>
+          <a:p/>
+        </p:txBody>
       </p:sp>
       <p:sp>
         <p:nvSpPr>
@@ -5181,79 +5116,44 @@
       </p:sp>
       <p:sp>
         <p:nvSpPr>
-          <p:cNvPr id="13" name="Text 11"/>
-          <p:cNvSpPr txBox="1"/>
-          <p:nvPr/>
-        </p:nvSpPr>
-        <p:spPr>
-          <a:xfrm>
-            <a:off x="640080" y="6446520"/>
-            <a:ext cx="8686800" cy="292608"/>
-          </a:xfrm>
-          <a:prstGeom prst="rect">
-            <a:avLst/>
-          </a:prstGeom>
-          <a:noFill/>
-          <a:ln/>
-        </p:spPr>
-        <p:txBody>
-          <a:bodyPr wrap="square" lIns="0" tIns="0" rIns="0" bIns="0" rtlCol="0" anchor="ctr"/>
-          <a:lstStyle/>
-          <a:p>
-            <a:pPr algn="l" indent="0" marL="0">
-              <a:buNone/>
-            </a:pPr>
-            <a:r>
-              <a:rPr lang="en-US" sz="900" dirty="0">
-                <a:solidFill>
-                  <a:srgbClr val="5D5D72"/>
-                </a:solidFill>
-                <a:latin typeface="Calibri" pitchFamily="34" charset="0"/>
-                <a:ea typeface="Calibri" pitchFamily="34" charset="-122"/>
-                <a:cs typeface="Calibri" pitchFamily="34" charset="-120"/>
-              </a:rPr>
-              <a:t>Usman Akram  •  COMSATS University Islamabad</a:t>
-            </a:r>
-            <a:endParaRPr lang="en-US" sz="900" dirty="0"/>
-          </a:p>
-        </p:txBody>
-      </p:sp>
-      <p:sp>
-        <p:nvSpPr>
-          <p:cNvPr id="14" name="Text 12"/>
-          <p:cNvSpPr txBox="1"/>
-          <p:nvPr/>
-        </p:nvSpPr>
-        <p:spPr>
-          <a:xfrm>
-            <a:off x="11155680" y="6446520"/>
-            <a:ext cx="457200" cy="292608"/>
-          </a:xfrm>
-          <a:prstGeom prst="rect">
-            <a:avLst/>
-          </a:prstGeom>
-          <a:noFill/>
-          <a:ln/>
-        </p:spPr>
-        <p:txBody>
-          <a:bodyPr wrap="square" lIns="0" tIns="0" rIns="0" bIns="0" rtlCol="0" anchor="ctr"/>
-          <a:lstStyle/>
-          <a:p>
-            <a:pPr algn="r" indent="0" marL="0">
-              <a:buNone/>
-            </a:pPr>
-            <a:r>
-              <a:rPr lang="en-US" sz="900" dirty="0">
-                <a:solidFill>
-                  <a:srgbClr val="5D5D72"/>
-                </a:solidFill>
-                <a:latin typeface="Calibri" pitchFamily="34" charset="0"/>
-                <a:ea typeface="Calibri" pitchFamily="34" charset="-122"/>
-                <a:cs typeface="Calibri" pitchFamily="34" charset="-120"/>
-              </a:rPr>
-              <a:t>12</a:t>
-            </a:r>
-            <a:endParaRPr lang="en-US" sz="900" dirty="0"/>
+          <p:cNvPr id="15" name="cuinotes-footer-mark"/>
+          <p:cNvSpPr txBox="1"/>
+          <p:nvPr/>
+        </p:nvSpPr>
+        <p:spPr>
+          <a:xfrm>
+            <a:off x="9951720" y="6455664"/>
+            <a:ext cx="2011680" cy="292608"/>
+          </a:xfrm>
+          <a:prstGeom prst="rect">
+            <a:avLst/>
+          </a:prstGeom>
+          <a:noFill/>
+        </p:spPr>
+        <p:txBody>
+          <a:bodyPr wrap="none" lIns="0" rIns="0" tIns="0" bIns="0">
+            <a:spAutoFit/>
+          </a:bodyPr>
+          <a:lstStyle/>
+          <a:p>
+            <a:pPr algn="r"/>
+            <a:r>
+              <a:rPr sz="1000">
+                <a:solidFill>
+                  <a:srgbClr val="8A939B"/>
+                </a:solidFill>
+                <a:hlinkClick r:id="rId3"/>
+              </a:rPr>
+              <a:t>cuinotes.com</a:t>
+            </a:r>
+            <a:r>
+              <a:rPr sz="1000">
+                <a:solidFill>
+                  <a:srgbClr val="8A939B"/>
+                </a:solidFill>
+              </a:rPr>
+              <a:t>  ·  12</a:t>
+            </a:r>
           </a:p>
         </p:txBody>
       </p:sp>
@@ -5388,6 +5288,10 @@
           </a:solidFill>
           <a:ln/>
         </p:spPr>
+        <p:txBody>
+          <a:bodyPr/>
+          <a:p/>
+        </p:txBody>
       </p:sp>
       <p:sp>
         <p:nvSpPr>
@@ -5468,6 +5372,10 @@
             <a:tailEnd type="triangle"/>
           </a:ln>
         </p:spPr>
+        <p:txBody>
+          <a:bodyPr/>
+          <a:p/>
+        </p:txBody>
       </p:sp>
       <p:sp>
         <p:nvSpPr>
@@ -5490,6 +5398,10 @@
           </a:solidFill>
           <a:ln/>
         </p:spPr>
+        <p:txBody>
+          <a:bodyPr/>
+          <a:p/>
+        </p:txBody>
       </p:sp>
       <p:sp>
         <p:nvSpPr>
@@ -5570,6 +5482,10 @@
             <a:tailEnd type="triangle"/>
           </a:ln>
         </p:spPr>
+        <p:txBody>
+          <a:bodyPr/>
+          <a:p/>
+        </p:txBody>
       </p:sp>
       <p:sp>
         <p:nvSpPr>
@@ -5592,6 +5508,10 @@
           </a:solidFill>
           <a:ln/>
         </p:spPr>
+        <p:txBody>
+          <a:bodyPr/>
+          <a:p/>
+        </p:txBody>
       </p:sp>
       <p:sp>
         <p:nvSpPr>
@@ -5672,6 +5592,10 @@
             <a:tailEnd type="triangle"/>
           </a:ln>
         </p:spPr>
+        <p:txBody>
+          <a:bodyPr/>
+          <a:p/>
+        </p:txBody>
       </p:sp>
       <p:sp>
         <p:nvSpPr>
@@ -5694,6 +5618,10 @@
           </a:solidFill>
           <a:ln/>
         </p:spPr>
+        <p:txBody>
+          <a:bodyPr/>
+          <a:p/>
+        </p:txBody>
       </p:sp>
       <p:sp>
         <p:nvSpPr>
@@ -5774,6 +5702,10 @@
             <a:tailEnd type="triangle"/>
           </a:ln>
         </p:spPr>
+        <p:txBody>
+          <a:bodyPr/>
+          <a:p/>
+        </p:txBody>
       </p:sp>
       <p:sp>
         <p:nvSpPr>
@@ -5796,6 +5728,10 @@
           </a:solidFill>
           <a:ln/>
         </p:spPr>
+        <p:txBody>
+          <a:bodyPr/>
+          <a:p/>
+        </p:txBody>
       </p:sp>
       <p:sp>
         <p:nvSpPr>
@@ -5894,79 +5830,44 @@
       </p:sp>
       <p:sp>
         <p:nvSpPr>
-          <p:cNvPr id="19" name="Text 17"/>
-          <p:cNvSpPr txBox="1"/>
-          <p:nvPr/>
-        </p:nvSpPr>
-        <p:spPr>
-          <a:xfrm>
-            <a:off x="640080" y="6446520"/>
-            <a:ext cx="8686800" cy="292608"/>
-          </a:xfrm>
-          <a:prstGeom prst="rect">
-            <a:avLst/>
-          </a:prstGeom>
-          <a:noFill/>
-          <a:ln/>
-        </p:spPr>
-        <p:txBody>
-          <a:bodyPr wrap="square" lIns="0" tIns="0" rIns="0" bIns="0" rtlCol="0" anchor="ctr"/>
-          <a:lstStyle/>
-          <a:p>
-            <a:pPr algn="l" indent="0" marL="0">
-              <a:buNone/>
-            </a:pPr>
-            <a:r>
-              <a:rPr lang="en-US" sz="900" dirty="0">
-                <a:solidFill>
-                  <a:srgbClr val="5D5D72"/>
-                </a:solidFill>
-                <a:latin typeface="Calibri" pitchFamily="34" charset="0"/>
-                <a:ea typeface="Calibri" pitchFamily="34" charset="-122"/>
-                <a:cs typeface="Calibri" pitchFamily="34" charset="-120"/>
-              </a:rPr>
-              <a:t>Usman Akram  •  COMSATS University Islamabad</a:t>
-            </a:r>
-            <a:endParaRPr lang="en-US" sz="900" dirty="0"/>
-          </a:p>
-        </p:txBody>
-      </p:sp>
-      <p:sp>
-        <p:nvSpPr>
-          <p:cNvPr id="20" name="Text 18"/>
-          <p:cNvSpPr txBox="1"/>
-          <p:nvPr/>
-        </p:nvSpPr>
-        <p:spPr>
-          <a:xfrm>
-            <a:off x="11155680" y="6446520"/>
-            <a:ext cx="457200" cy="292608"/>
-          </a:xfrm>
-          <a:prstGeom prst="rect">
-            <a:avLst/>
-          </a:prstGeom>
-          <a:noFill/>
-          <a:ln/>
-        </p:spPr>
-        <p:txBody>
-          <a:bodyPr wrap="square" lIns="0" tIns="0" rIns="0" bIns="0" rtlCol="0" anchor="ctr"/>
-          <a:lstStyle/>
-          <a:p>
-            <a:pPr algn="r" indent="0" marL="0">
-              <a:buNone/>
-            </a:pPr>
-            <a:r>
-              <a:rPr lang="en-US" sz="900" dirty="0">
-                <a:solidFill>
-                  <a:srgbClr val="5D5D72"/>
-                </a:solidFill>
-                <a:latin typeface="Calibri" pitchFamily="34" charset="0"/>
-                <a:ea typeface="Calibri" pitchFamily="34" charset="-122"/>
-                <a:cs typeface="Calibri" pitchFamily="34" charset="-120"/>
-              </a:rPr>
-              <a:t>13</a:t>
-            </a:r>
-            <a:endParaRPr lang="en-US" sz="900" dirty="0"/>
+          <p:cNvPr id="21" name="cuinotes-footer-mark"/>
+          <p:cNvSpPr txBox="1"/>
+          <p:nvPr/>
+        </p:nvSpPr>
+        <p:spPr>
+          <a:xfrm>
+            <a:off x="9951720" y="6455664"/>
+            <a:ext cx="2011680" cy="292608"/>
+          </a:xfrm>
+          <a:prstGeom prst="rect">
+            <a:avLst/>
+          </a:prstGeom>
+          <a:noFill/>
+        </p:spPr>
+        <p:txBody>
+          <a:bodyPr wrap="none" lIns="0" rIns="0" tIns="0" bIns="0">
+            <a:spAutoFit/>
+          </a:bodyPr>
+          <a:lstStyle/>
+          <a:p>
+            <a:pPr algn="r"/>
+            <a:r>
+              <a:rPr sz="1000">
+                <a:solidFill>
+                  <a:srgbClr val="8A939B"/>
+                </a:solidFill>
+                <a:hlinkClick r:id="rId3"/>
+              </a:rPr>
+              <a:t>cuinotes.com</a:t>
+            </a:r>
+            <a:r>
+              <a:rPr sz="1000">
+                <a:solidFill>
+                  <a:srgbClr val="8A939B"/>
+                </a:solidFill>
+              </a:rPr>
+              <a:t>  ·  13</a:t>
+            </a:r>
           </a:p>
         </p:txBody>
       </p:sp>
@@ -6106,6 +6007,10 @@
             <a:prstDash val="solid"/>
           </a:ln>
         </p:spPr>
+        <p:txBody>
+          <a:bodyPr/>
+          <a:p/>
+        </p:txBody>
       </p:sp>
       <p:sp>
         <p:nvSpPr>
@@ -6187,79 +6092,44 @@
       </p:sp>
       <p:sp>
         <p:nvSpPr>
-          <p:cNvPr id="7" name="Text 5"/>
-          <p:cNvSpPr txBox="1"/>
-          <p:nvPr/>
-        </p:nvSpPr>
-        <p:spPr>
-          <a:xfrm>
-            <a:off x="640080" y="6446520"/>
-            <a:ext cx="8686800" cy="292608"/>
-          </a:xfrm>
-          <a:prstGeom prst="rect">
-            <a:avLst/>
-          </a:prstGeom>
-          <a:noFill/>
-          <a:ln/>
-        </p:spPr>
-        <p:txBody>
-          <a:bodyPr wrap="square" lIns="0" tIns="0" rIns="0" bIns="0" rtlCol="0" anchor="ctr"/>
-          <a:lstStyle/>
-          <a:p>
-            <a:pPr algn="l" indent="0" marL="0">
-              <a:buNone/>
-            </a:pPr>
-            <a:r>
-              <a:rPr lang="en-US" sz="900" dirty="0">
-                <a:solidFill>
-                  <a:srgbClr val="5D5D72"/>
-                </a:solidFill>
-                <a:latin typeface="Calibri" pitchFamily="34" charset="0"/>
-                <a:ea typeface="Calibri" pitchFamily="34" charset="-122"/>
-                <a:cs typeface="Calibri" pitchFamily="34" charset="-120"/>
-              </a:rPr>
-              <a:t>Usman Akram  •  COMSATS University Islamabad</a:t>
-            </a:r>
-            <a:endParaRPr lang="en-US" sz="900" dirty="0"/>
-          </a:p>
-        </p:txBody>
-      </p:sp>
-      <p:sp>
-        <p:nvSpPr>
-          <p:cNvPr id="8" name="Text 6"/>
-          <p:cNvSpPr txBox="1"/>
-          <p:nvPr/>
-        </p:nvSpPr>
-        <p:spPr>
-          <a:xfrm>
-            <a:off x="11155680" y="6446520"/>
-            <a:ext cx="457200" cy="292608"/>
-          </a:xfrm>
-          <a:prstGeom prst="rect">
-            <a:avLst/>
-          </a:prstGeom>
-          <a:noFill/>
-          <a:ln/>
-        </p:spPr>
-        <p:txBody>
-          <a:bodyPr wrap="square" lIns="0" tIns="0" rIns="0" bIns="0" rtlCol="0" anchor="ctr"/>
-          <a:lstStyle/>
-          <a:p>
-            <a:pPr algn="r" indent="0" marL="0">
-              <a:buNone/>
-            </a:pPr>
-            <a:r>
-              <a:rPr lang="en-US" sz="900" dirty="0">
-                <a:solidFill>
-                  <a:srgbClr val="5D5D72"/>
-                </a:solidFill>
-                <a:latin typeface="Calibri" pitchFamily="34" charset="0"/>
-                <a:ea typeface="Calibri" pitchFamily="34" charset="-122"/>
-                <a:cs typeface="Calibri" pitchFamily="34" charset="-120"/>
-              </a:rPr>
-              <a:t>14</a:t>
-            </a:r>
-            <a:endParaRPr lang="en-US" sz="900" dirty="0"/>
+          <p:cNvPr id="9" name="cuinotes-footer-mark"/>
+          <p:cNvSpPr txBox="1"/>
+          <p:nvPr/>
+        </p:nvSpPr>
+        <p:spPr>
+          <a:xfrm>
+            <a:off x="9951720" y="6455664"/>
+            <a:ext cx="2011680" cy="292608"/>
+          </a:xfrm>
+          <a:prstGeom prst="rect">
+            <a:avLst/>
+          </a:prstGeom>
+          <a:noFill/>
+        </p:spPr>
+        <p:txBody>
+          <a:bodyPr wrap="none" lIns="0" rIns="0" tIns="0" bIns="0">
+            <a:spAutoFit/>
+          </a:bodyPr>
+          <a:lstStyle/>
+          <a:p>
+            <a:pPr algn="r"/>
+            <a:r>
+              <a:rPr sz="1000">
+                <a:solidFill>
+                  <a:srgbClr val="8A939B"/>
+                </a:solidFill>
+                <a:hlinkClick r:id="rId3"/>
+              </a:rPr>
+              <a:t>cuinotes.com</a:t>
+            </a:r>
+            <a:r>
+              <a:rPr sz="1000">
+                <a:solidFill>
+                  <a:srgbClr val="8A939B"/>
+                </a:solidFill>
+              </a:rPr>
+              <a:t>  ·  14</a:t>
+            </a:r>
           </a:p>
         </p:txBody>
       </p:sp>
@@ -6399,6 +6269,10 @@
             <a:prstDash val="solid"/>
           </a:ln>
         </p:spPr>
+        <p:txBody>
+          <a:bodyPr/>
+          <a:p/>
+        </p:txBody>
       </p:sp>
       <p:sp>
         <p:nvSpPr>
@@ -6480,79 +6354,44 @@
       </p:sp>
       <p:sp>
         <p:nvSpPr>
-          <p:cNvPr id="7" name="Text 5"/>
-          <p:cNvSpPr txBox="1"/>
-          <p:nvPr/>
-        </p:nvSpPr>
-        <p:spPr>
-          <a:xfrm>
-            <a:off x="640080" y="6446520"/>
-            <a:ext cx="8686800" cy="292608"/>
-          </a:xfrm>
-          <a:prstGeom prst="rect">
-            <a:avLst/>
-          </a:prstGeom>
-          <a:noFill/>
-          <a:ln/>
-        </p:spPr>
-        <p:txBody>
-          <a:bodyPr wrap="square" lIns="0" tIns="0" rIns="0" bIns="0" rtlCol="0" anchor="ctr"/>
-          <a:lstStyle/>
-          <a:p>
-            <a:pPr algn="l" indent="0" marL="0">
-              <a:buNone/>
-            </a:pPr>
-            <a:r>
-              <a:rPr lang="en-US" sz="900" dirty="0">
-                <a:solidFill>
-                  <a:srgbClr val="5D5D72"/>
-                </a:solidFill>
-                <a:latin typeface="Calibri" pitchFamily="34" charset="0"/>
-                <a:ea typeface="Calibri" pitchFamily="34" charset="-122"/>
-                <a:cs typeface="Calibri" pitchFamily="34" charset="-120"/>
-              </a:rPr>
-              <a:t>Usman Akram  •  COMSATS University Islamabad</a:t>
-            </a:r>
-            <a:endParaRPr lang="en-US" sz="900" dirty="0"/>
-          </a:p>
-        </p:txBody>
-      </p:sp>
-      <p:sp>
-        <p:nvSpPr>
-          <p:cNvPr id="8" name="Text 6"/>
-          <p:cNvSpPr txBox="1"/>
-          <p:nvPr/>
-        </p:nvSpPr>
-        <p:spPr>
-          <a:xfrm>
-            <a:off x="11155680" y="6446520"/>
-            <a:ext cx="457200" cy="292608"/>
-          </a:xfrm>
-          <a:prstGeom prst="rect">
-            <a:avLst/>
-          </a:prstGeom>
-          <a:noFill/>
-          <a:ln/>
-        </p:spPr>
-        <p:txBody>
-          <a:bodyPr wrap="square" lIns="0" tIns="0" rIns="0" bIns="0" rtlCol="0" anchor="ctr"/>
-          <a:lstStyle/>
-          <a:p>
-            <a:pPr algn="r" indent="0" marL="0">
-              <a:buNone/>
-            </a:pPr>
-            <a:r>
-              <a:rPr lang="en-US" sz="900" dirty="0">
-                <a:solidFill>
-                  <a:srgbClr val="5D5D72"/>
-                </a:solidFill>
-                <a:latin typeface="Calibri" pitchFamily="34" charset="0"/>
-                <a:ea typeface="Calibri" pitchFamily="34" charset="-122"/>
-                <a:cs typeface="Calibri" pitchFamily="34" charset="-120"/>
-              </a:rPr>
-              <a:t>15</a:t>
-            </a:r>
-            <a:endParaRPr lang="en-US" sz="900" dirty="0"/>
+          <p:cNvPr id="9" name="cuinotes-footer-mark"/>
+          <p:cNvSpPr txBox="1"/>
+          <p:nvPr/>
+        </p:nvSpPr>
+        <p:spPr>
+          <a:xfrm>
+            <a:off x="9951720" y="6455664"/>
+            <a:ext cx="2011680" cy="292608"/>
+          </a:xfrm>
+          <a:prstGeom prst="rect">
+            <a:avLst/>
+          </a:prstGeom>
+          <a:noFill/>
+        </p:spPr>
+        <p:txBody>
+          <a:bodyPr wrap="none" lIns="0" rIns="0" tIns="0" bIns="0">
+            <a:spAutoFit/>
+          </a:bodyPr>
+          <a:lstStyle/>
+          <a:p>
+            <a:pPr algn="r"/>
+            <a:r>
+              <a:rPr sz="1000">
+                <a:solidFill>
+                  <a:srgbClr val="8A939B"/>
+                </a:solidFill>
+                <a:hlinkClick r:id="rId3"/>
+              </a:rPr>
+              <a:t>cuinotes.com</a:t>
+            </a:r>
+            <a:r>
+              <a:rPr sz="1000">
+                <a:solidFill>
+                  <a:srgbClr val="8A939B"/>
+                </a:solidFill>
+              </a:rPr>
+              <a:t>  ·  15</a:t>
+            </a:r>
           </a:p>
         </p:txBody>
       </p:sp>
@@ -6685,6 +6524,10 @@
           </a:solidFill>
           <a:ln/>
         </p:spPr>
+        <p:txBody>
+          <a:bodyPr/>
+          <a:p/>
+        </p:txBody>
       </p:sp>
       <p:sp>
         <p:nvSpPr>
@@ -6783,6 +6626,10 @@
           </a:solidFill>
           <a:ln/>
         </p:spPr>
+        <p:txBody>
+          <a:bodyPr/>
+          <a:p/>
+        </p:txBody>
       </p:sp>
       <p:sp>
         <p:nvSpPr>
@@ -6881,6 +6728,10 @@
           </a:solidFill>
           <a:ln/>
         </p:spPr>
+        <p:txBody>
+          <a:bodyPr/>
+          <a:p/>
+        </p:txBody>
       </p:sp>
       <p:sp>
         <p:nvSpPr>
@@ -6962,79 +6813,44 @@
       </p:sp>
       <p:sp>
         <p:nvSpPr>
-          <p:cNvPr id="13" name="Text 11"/>
-          <p:cNvSpPr txBox="1"/>
-          <p:nvPr/>
-        </p:nvSpPr>
-        <p:spPr>
-          <a:xfrm>
-            <a:off x="640080" y="6446520"/>
-            <a:ext cx="8686800" cy="292608"/>
-          </a:xfrm>
-          <a:prstGeom prst="rect">
-            <a:avLst/>
-          </a:prstGeom>
-          <a:noFill/>
-          <a:ln/>
-        </p:spPr>
-        <p:txBody>
-          <a:bodyPr wrap="square" lIns="0" tIns="0" rIns="0" bIns="0" rtlCol="0" anchor="ctr"/>
-          <a:lstStyle/>
-          <a:p>
-            <a:pPr algn="l" indent="0" marL="0">
-              <a:buNone/>
-            </a:pPr>
-            <a:r>
-              <a:rPr lang="en-US" sz="900" dirty="0">
-                <a:solidFill>
-                  <a:srgbClr val="5D5D72"/>
-                </a:solidFill>
-                <a:latin typeface="Calibri" pitchFamily="34" charset="0"/>
-                <a:ea typeface="Calibri" pitchFamily="34" charset="-122"/>
-                <a:cs typeface="Calibri" pitchFamily="34" charset="-120"/>
-              </a:rPr>
-              <a:t>Usman Akram  •  COMSATS University Islamabad</a:t>
-            </a:r>
-            <a:endParaRPr lang="en-US" sz="900" dirty="0"/>
-          </a:p>
-        </p:txBody>
-      </p:sp>
-      <p:sp>
-        <p:nvSpPr>
-          <p:cNvPr id="14" name="Text 12"/>
-          <p:cNvSpPr txBox="1"/>
-          <p:nvPr/>
-        </p:nvSpPr>
-        <p:spPr>
-          <a:xfrm>
-            <a:off x="11155680" y="6446520"/>
-            <a:ext cx="457200" cy="292608"/>
-          </a:xfrm>
-          <a:prstGeom prst="rect">
-            <a:avLst/>
-          </a:prstGeom>
-          <a:noFill/>
-          <a:ln/>
-        </p:spPr>
-        <p:txBody>
-          <a:bodyPr wrap="square" lIns="0" tIns="0" rIns="0" bIns="0" rtlCol="0" anchor="ctr"/>
-          <a:lstStyle/>
-          <a:p>
-            <a:pPr algn="r" indent="0" marL="0">
-              <a:buNone/>
-            </a:pPr>
-            <a:r>
-              <a:rPr lang="en-US" sz="900" dirty="0">
-                <a:solidFill>
-                  <a:srgbClr val="5D5D72"/>
-                </a:solidFill>
-                <a:latin typeface="Calibri" pitchFamily="34" charset="0"/>
-                <a:ea typeface="Calibri" pitchFamily="34" charset="-122"/>
-                <a:cs typeface="Calibri" pitchFamily="34" charset="-120"/>
-              </a:rPr>
-              <a:t>16</a:t>
-            </a:r>
-            <a:endParaRPr lang="en-US" sz="900" dirty="0"/>
+          <p:cNvPr id="15" name="cuinotes-footer-mark"/>
+          <p:cNvSpPr txBox="1"/>
+          <p:nvPr/>
+        </p:nvSpPr>
+        <p:spPr>
+          <a:xfrm>
+            <a:off x="9951720" y="6455664"/>
+            <a:ext cx="2011680" cy="292608"/>
+          </a:xfrm>
+          <a:prstGeom prst="rect">
+            <a:avLst/>
+          </a:prstGeom>
+          <a:noFill/>
+        </p:spPr>
+        <p:txBody>
+          <a:bodyPr wrap="none" lIns="0" rIns="0" tIns="0" bIns="0">
+            <a:spAutoFit/>
+          </a:bodyPr>
+          <a:lstStyle/>
+          <a:p>
+            <a:pPr algn="r"/>
+            <a:r>
+              <a:rPr sz="1000">
+                <a:solidFill>
+                  <a:srgbClr val="8A939B"/>
+                </a:solidFill>
+                <a:hlinkClick r:id="rId3"/>
+              </a:rPr>
+              <a:t>cuinotes.com</a:t>
+            </a:r>
+            <a:r>
+              <a:rPr sz="1000">
+                <a:solidFill>
+                  <a:srgbClr val="8A939B"/>
+                </a:solidFill>
+              </a:rPr>
+              <a:t>  ·  16</a:t>
+            </a:r>
           </a:p>
         </p:txBody>
       </p:sp>
@@ -7169,6 +6985,10 @@
           </a:solidFill>
           <a:ln/>
         </p:spPr>
+        <p:txBody>
+          <a:bodyPr/>
+          <a:p/>
+        </p:txBody>
       </p:sp>
       <p:sp>
         <p:nvSpPr>
@@ -7373,79 +7193,44 @@
       </p:sp>
       <p:sp>
         <p:nvSpPr>
-          <p:cNvPr id="7" name="Text 5"/>
-          <p:cNvSpPr txBox="1"/>
-          <p:nvPr/>
-        </p:nvSpPr>
-        <p:spPr>
-          <a:xfrm>
-            <a:off x="640080" y="6446520"/>
-            <a:ext cx="8686800" cy="292608"/>
-          </a:xfrm>
-          <a:prstGeom prst="rect">
-            <a:avLst/>
-          </a:prstGeom>
-          <a:noFill/>
-          <a:ln/>
-        </p:spPr>
-        <p:txBody>
-          <a:bodyPr wrap="square" lIns="0" tIns="0" rIns="0" bIns="0" rtlCol="0" anchor="ctr"/>
-          <a:lstStyle/>
-          <a:p>
-            <a:pPr algn="l" indent="0" marL="0">
-              <a:buNone/>
-            </a:pPr>
-            <a:r>
-              <a:rPr lang="en-US" sz="900" dirty="0">
-                <a:solidFill>
-                  <a:srgbClr val="5D5D72"/>
-                </a:solidFill>
-                <a:latin typeface="Calibri" pitchFamily="34" charset="0"/>
-                <a:ea typeface="Calibri" pitchFamily="34" charset="-122"/>
-                <a:cs typeface="Calibri" pitchFamily="34" charset="-120"/>
-              </a:rPr>
-              <a:t>Usman Akram  •  COMSATS University Islamabad</a:t>
-            </a:r>
-            <a:endParaRPr lang="en-US" sz="900" dirty="0"/>
-          </a:p>
-        </p:txBody>
-      </p:sp>
-      <p:sp>
-        <p:nvSpPr>
-          <p:cNvPr id="8" name="Text 6"/>
-          <p:cNvSpPr txBox="1"/>
-          <p:nvPr/>
-        </p:nvSpPr>
-        <p:spPr>
-          <a:xfrm>
-            <a:off x="11155680" y="6446520"/>
-            <a:ext cx="457200" cy="292608"/>
-          </a:xfrm>
-          <a:prstGeom prst="rect">
-            <a:avLst/>
-          </a:prstGeom>
-          <a:noFill/>
-          <a:ln/>
-        </p:spPr>
-        <p:txBody>
-          <a:bodyPr wrap="square" lIns="0" tIns="0" rIns="0" bIns="0" rtlCol="0" anchor="ctr"/>
-          <a:lstStyle/>
-          <a:p>
-            <a:pPr algn="r" indent="0" marL="0">
-              <a:buNone/>
-            </a:pPr>
-            <a:r>
-              <a:rPr lang="en-US" sz="900" dirty="0">
-                <a:solidFill>
-                  <a:srgbClr val="5D5D72"/>
-                </a:solidFill>
-                <a:latin typeface="Calibri" pitchFamily="34" charset="0"/>
-                <a:ea typeface="Calibri" pitchFamily="34" charset="-122"/>
-                <a:cs typeface="Calibri" pitchFamily="34" charset="-120"/>
-              </a:rPr>
-              <a:t>17</a:t>
-            </a:r>
-            <a:endParaRPr lang="en-US" sz="900" dirty="0"/>
+          <p:cNvPr id="9" name="cuinotes-footer-mark"/>
+          <p:cNvSpPr txBox="1"/>
+          <p:nvPr/>
+        </p:nvSpPr>
+        <p:spPr>
+          <a:xfrm>
+            <a:off x="9951720" y="6455664"/>
+            <a:ext cx="2011680" cy="292608"/>
+          </a:xfrm>
+          <a:prstGeom prst="rect">
+            <a:avLst/>
+          </a:prstGeom>
+          <a:noFill/>
+        </p:spPr>
+        <p:txBody>
+          <a:bodyPr wrap="none" lIns="0" rIns="0" tIns="0" bIns="0">
+            <a:spAutoFit/>
+          </a:bodyPr>
+          <a:lstStyle/>
+          <a:p>
+            <a:pPr algn="r"/>
+            <a:r>
+              <a:rPr sz="1000">
+                <a:solidFill>
+                  <a:srgbClr val="8A939B"/>
+                </a:solidFill>
+                <a:hlinkClick r:id="rId3"/>
+              </a:rPr>
+              <a:t>cuinotes.com</a:t>
+            </a:r>
+            <a:r>
+              <a:rPr sz="1000">
+                <a:solidFill>
+                  <a:srgbClr val="8A939B"/>
+                </a:solidFill>
+              </a:rPr>
+              <a:t>  ·  17</a:t>
+            </a:r>
           </a:p>
         </p:txBody>
       </p:sp>
@@ -7578,6 +7363,10 @@
           </a:solidFill>
           <a:ln/>
         </p:spPr>
+        <p:txBody>
+          <a:bodyPr/>
+          <a:p/>
+        </p:txBody>
       </p:sp>
       <p:sp>
         <p:nvSpPr>
@@ -7676,6 +7465,10 @@
           </a:solidFill>
           <a:ln/>
         </p:spPr>
+        <p:txBody>
+          <a:bodyPr/>
+          <a:p/>
+        </p:txBody>
       </p:sp>
       <p:sp>
         <p:nvSpPr>
@@ -7774,6 +7567,10 @@
           </a:solidFill>
           <a:ln/>
         </p:spPr>
+        <p:txBody>
+          <a:bodyPr/>
+          <a:p/>
+        </p:txBody>
       </p:sp>
       <p:sp>
         <p:nvSpPr>
@@ -7855,79 +7652,44 @@
       </p:sp>
       <p:sp>
         <p:nvSpPr>
-          <p:cNvPr id="13" name="Text 11"/>
-          <p:cNvSpPr txBox="1"/>
-          <p:nvPr/>
-        </p:nvSpPr>
-        <p:spPr>
-          <a:xfrm>
-            <a:off x="640080" y="6446520"/>
-            <a:ext cx="8686800" cy="292608"/>
-          </a:xfrm>
-          <a:prstGeom prst="rect">
-            <a:avLst/>
-          </a:prstGeom>
-          <a:noFill/>
-          <a:ln/>
-        </p:spPr>
-        <p:txBody>
-          <a:bodyPr wrap="square" lIns="0" tIns="0" rIns="0" bIns="0" rtlCol="0" anchor="ctr"/>
-          <a:lstStyle/>
-          <a:p>
-            <a:pPr algn="l" indent="0" marL="0">
-              <a:buNone/>
-            </a:pPr>
-            <a:r>
-              <a:rPr lang="en-US" sz="900" dirty="0">
-                <a:solidFill>
-                  <a:srgbClr val="5D5D72"/>
-                </a:solidFill>
-                <a:latin typeface="Calibri" pitchFamily="34" charset="0"/>
-                <a:ea typeface="Calibri" pitchFamily="34" charset="-122"/>
-                <a:cs typeface="Calibri" pitchFamily="34" charset="-120"/>
-              </a:rPr>
-              <a:t>Usman Akram  •  COMSATS University Islamabad</a:t>
-            </a:r>
-            <a:endParaRPr lang="en-US" sz="900" dirty="0"/>
-          </a:p>
-        </p:txBody>
-      </p:sp>
-      <p:sp>
-        <p:nvSpPr>
-          <p:cNvPr id="14" name="Text 12"/>
-          <p:cNvSpPr txBox="1"/>
-          <p:nvPr/>
-        </p:nvSpPr>
-        <p:spPr>
-          <a:xfrm>
-            <a:off x="11155680" y="6446520"/>
-            <a:ext cx="457200" cy="292608"/>
-          </a:xfrm>
-          <a:prstGeom prst="rect">
-            <a:avLst/>
-          </a:prstGeom>
-          <a:noFill/>
-          <a:ln/>
-        </p:spPr>
-        <p:txBody>
-          <a:bodyPr wrap="square" lIns="0" tIns="0" rIns="0" bIns="0" rtlCol="0" anchor="ctr"/>
-          <a:lstStyle/>
-          <a:p>
-            <a:pPr algn="r" indent="0" marL="0">
-              <a:buNone/>
-            </a:pPr>
-            <a:r>
-              <a:rPr lang="en-US" sz="900" dirty="0">
-                <a:solidFill>
-                  <a:srgbClr val="5D5D72"/>
-                </a:solidFill>
-                <a:latin typeface="Calibri" pitchFamily="34" charset="0"/>
-                <a:ea typeface="Calibri" pitchFamily="34" charset="-122"/>
-                <a:cs typeface="Calibri" pitchFamily="34" charset="-120"/>
-              </a:rPr>
-              <a:t>18</a:t>
-            </a:r>
-            <a:endParaRPr lang="en-US" sz="900" dirty="0"/>
+          <p:cNvPr id="15" name="cuinotes-footer-mark"/>
+          <p:cNvSpPr txBox="1"/>
+          <p:nvPr/>
+        </p:nvSpPr>
+        <p:spPr>
+          <a:xfrm>
+            <a:off x="9951720" y="6455664"/>
+            <a:ext cx="2011680" cy="292608"/>
+          </a:xfrm>
+          <a:prstGeom prst="rect">
+            <a:avLst/>
+          </a:prstGeom>
+          <a:noFill/>
+        </p:spPr>
+        <p:txBody>
+          <a:bodyPr wrap="none" lIns="0" rIns="0" tIns="0" bIns="0">
+            <a:spAutoFit/>
+          </a:bodyPr>
+          <a:lstStyle/>
+          <a:p>
+            <a:pPr algn="r"/>
+            <a:r>
+              <a:rPr sz="1000">
+                <a:solidFill>
+                  <a:srgbClr val="8A939B"/>
+                </a:solidFill>
+                <a:hlinkClick r:id="rId3"/>
+              </a:rPr>
+              <a:t>cuinotes.com</a:t>
+            </a:r>
+            <a:r>
+              <a:rPr sz="1000">
+                <a:solidFill>
+                  <a:srgbClr val="8A939B"/>
+                </a:solidFill>
+              </a:rPr>
+              <a:t>  ·  18</a:t>
+            </a:r>
           </a:p>
         </p:txBody>
       </p:sp>
@@ -8060,6 +7822,10 @@
           </a:solidFill>
           <a:ln/>
         </p:spPr>
+        <p:txBody>
+          <a:bodyPr/>
+          <a:p/>
+        </p:txBody>
       </p:sp>
       <p:sp>
         <p:nvSpPr>
@@ -8158,6 +7924,10 @@
           </a:solidFill>
           <a:ln/>
         </p:spPr>
+        <p:txBody>
+          <a:bodyPr/>
+          <a:p/>
+        </p:txBody>
       </p:sp>
       <p:sp>
         <p:nvSpPr>
@@ -8239,79 +8009,44 @@
       </p:sp>
       <p:sp>
         <p:nvSpPr>
-          <p:cNvPr id="10" name="Text 8"/>
-          <p:cNvSpPr txBox="1"/>
-          <p:nvPr/>
-        </p:nvSpPr>
-        <p:spPr>
-          <a:xfrm>
-            <a:off x="640080" y="6446520"/>
-            <a:ext cx="8686800" cy="292608"/>
-          </a:xfrm>
-          <a:prstGeom prst="rect">
-            <a:avLst/>
-          </a:prstGeom>
-          <a:noFill/>
-          <a:ln/>
-        </p:spPr>
-        <p:txBody>
-          <a:bodyPr wrap="square" lIns="0" tIns="0" rIns="0" bIns="0" rtlCol="0" anchor="ctr"/>
-          <a:lstStyle/>
-          <a:p>
-            <a:pPr algn="l" indent="0" marL="0">
-              <a:buNone/>
-            </a:pPr>
-            <a:r>
-              <a:rPr lang="en-US" sz="900" dirty="0">
-                <a:solidFill>
-                  <a:srgbClr val="5D5D72"/>
-                </a:solidFill>
-                <a:latin typeface="Calibri" pitchFamily="34" charset="0"/>
-                <a:ea typeface="Calibri" pitchFamily="34" charset="-122"/>
-                <a:cs typeface="Calibri" pitchFamily="34" charset="-120"/>
-              </a:rPr>
-              <a:t>Usman Akram  •  COMSATS University Islamabad</a:t>
-            </a:r>
-            <a:endParaRPr lang="en-US" sz="900" dirty="0"/>
-          </a:p>
-        </p:txBody>
-      </p:sp>
-      <p:sp>
-        <p:nvSpPr>
-          <p:cNvPr id="11" name="Text 9"/>
-          <p:cNvSpPr txBox="1"/>
-          <p:nvPr/>
-        </p:nvSpPr>
-        <p:spPr>
-          <a:xfrm>
-            <a:off x="11155680" y="6446520"/>
-            <a:ext cx="457200" cy="292608"/>
-          </a:xfrm>
-          <a:prstGeom prst="rect">
-            <a:avLst/>
-          </a:prstGeom>
-          <a:noFill/>
-          <a:ln/>
-        </p:spPr>
-        <p:txBody>
-          <a:bodyPr wrap="square" lIns="0" tIns="0" rIns="0" bIns="0" rtlCol="0" anchor="ctr"/>
-          <a:lstStyle/>
-          <a:p>
-            <a:pPr algn="r" indent="0" marL="0">
-              <a:buNone/>
-            </a:pPr>
-            <a:r>
-              <a:rPr lang="en-US" sz="900" dirty="0">
-                <a:solidFill>
-                  <a:srgbClr val="5D5D72"/>
-                </a:solidFill>
-                <a:latin typeface="Calibri" pitchFamily="34" charset="0"/>
-                <a:ea typeface="Calibri" pitchFamily="34" charset="-122"/>
-                <a:cs typeface="Calibri" pitchFamily="34" charset="-120"/>
-              </a:rPr>
-              <a:t>19</a:t>
-            </a:r>
-            <a:endParaRPr lang="en-US" sz="900" dirty="0"/>
+          <p:cNvPr id="12" name="cuinotes-footer-mark"/>
+          <p:cNvSpPr txBox="1"/>
+          <p:nvPr/>
+        </p:nvSpPr>
+        <p:spPr>
+          <a:xfrm>
+            <a:off x="9951720" y="6455664"/>
+            <a:ext cx="2011680" cy="292608"/>
+          </a:xfrm>
+          <a:prstGeom prst="rect">
+            <a:avLst/>
+          </a:prstGeom>
+          <a:noFill/>
+        </p:spPr>
+        <p:txBody>
+          <a:bodyPr wrap="none" lIns="0" rIns="0" tIns="0" bIns="0">
+            <a:spAutoFit/>
+          </a:bodyPr>
+          <a:lstStyle/>
+          <a:p>
+            <a:pPr algn="r"/>
+            <a:r>
+              <a:rPr sz="1000">
+                <a:solidFill>
+                  <a:srgbClr val="8A939B"/>
+                </a:solidFill>
+                <a:hlinkClick r:id="rId3"/>
+              </a:rPr>
+              <a:t>cuinotes.com</a:t>
+            </a:r>
+            <a:r>
+              <a:rPr sz="1000">
+                <a:solidFill>
+                  <a:srgbClr val="8A939B"/>
+                </a:solidFill>
+              </a:rPr>
+              <a:t>  ·  19</a:t>
+            </a:r>
           </a:p>
         </p:txBody>
       </p:sp>
@@ -8444,6 +8179,10 @@
           </a:solidFill>
           <a:ln/>
         </p:spPr>
+        <p:txBody>
+          <a:bodyPr/>
+          <a:p/>
+        </p:txBody>
       </p:sp>
       <p:sp>
         <p:nvSpPr>
@@ -8542,6 +8281,10 @@
           </a:solidFill>
           <a:ln/>
         </p:spPr>
+        <p:txBody>
+          <a:bodyPr/>
+          <a:p/>
+        </p:txBody>
       </p:sp>
       <p:sp>
         <p:nvSpPr>
@@ -8640,6 +8383,10 @@
           </a:solidFill>
           <a:ln/>
         </p:spPr>
+        <p:txBody>
+          <a:bodyPr/>
+          <a:p/>
+        </p:txBody>
       </p:sp>
       <p:sp>
         <p:nvSpPr>
@@ -8738,6 +8485,10 @@
           </a:solidFill>
           <a:ln/>
         </p:spPr>
+        <p:txBody>
+          <a:bodyPr/>
+          <a:p/>
+        </p:txBody>
       </p:sp>
       <p:sp>
         <p:nvSpPr>
@@ -8836,6 +8587,10 @@
           </a:solidFill>
           <a:ln/>
         </p:spPr>
+        <p:txBody>
+          <a:bodyPr/>
+          <a:p/>
+        </p:txBody>
       </p:sp>
       <p:sp>
         <p:nvSpPr>
@@ -8934,6 +8689,10 @@
           </a:solidFill>
           <a:ln/>
         </p:spPr>
+        <p:txBody>
+          <a:bodyPr/>
+          <a:p/>
+        </p:txBody>
       </p:sp>
       <p:sp>
         <p:nvSpPr>
@@ -9015,79 +8774,44 @@
       </p:sp>
       <p:sp>
         <p:nvSpPr>
-          <p:cNvPr id="22" name="Text 20"/>
-          <p:cNvSpPr txBox="1"/>
-          <p:nvPr/>
-        </p:nvSpPr>
-        <p:spPr>
-          <a:xfrm>
-            <a:off x="640080" y="6446520"/>
-            <a:ext cx="8686800" cy="292608"/>
-          </a:xfrm>
-          <a:prstGeom prst="rect">
-            <a:avLst/>
-          </a:prstGeom>
-          <a:noFill/>
-          <a:ln/>
-        </p:spPr>
-        <p:txBody>
-          <a:bodyPr wrap="square" lIns="0" tIns="0" rIns="0" bIns="0" rtlCol="0" anchor="ctr"/>
-          <a:lstStyle/>
-          <a:p>
-            <a:pPr algn="l" indent="0" marL="0">
-              <a:buNone/>
-            </a:pPr>
-            <a:r>
-              <a:rPr lang="en-US" sz="900" dirty="0">
-                <a:solidFill>
-                  <a:srgbClr val="5D5D72"/>
-                </a:solidFill>
-                <a:latin typeface="Calibri" pitchFamily="34" charset="0"/>
-                <a:ea typeface="Calibri" pitchFamily="34" charset="-122"/>
-                <a:cs typeface="Calibri" pitchFamily="34" charset="-120"/>
-              </a:rPr>
-              <a:t>Usman Akram  •  COMSATS University Islamabad</a:t>
-            </a:r>
-            <a:endParaRPr lang="en-US" sz="900" dirty="0"/>
-          </a:p>
-        </p:txBody>
-      </p:sp>
-      <p:sp>
-        <p:nvSpPr>
-          <p:cNvPr id="23" name="Text 21"/>
-          <p:cNvSpPr txBox="1"/>
-          <p:nvPr/>
-        </p:nvSpPr>
-        <p:spPr>
-          <a:xfrm>
-            <a:off x="11155680" y="6446520"/>
-            <a:ext cx="457200" cy="292608"/>
-          </a:xfrm>
-          <a:prstGeom prst="rect">
-            <a:avLst/>
-          </a:prstGeom>
-          <a:noFill/>
-          <a:ln/>
-        </p:spPr>
-        <p:txBody>
-          <a:bodyPr wrap="square" lIns="0" tIns="0" rIns="0" bIns="0" rtlCol="0" anchor="ctr"/>
-          <a:lstStyle/>
-          <a:p>
-            <a:pPr algn="r" indent="0" marL="0">
-              <a:buNone/>
-            </a:pPr>
-            <a:r>
-              <a:rPr lang="en-US" sz="900" dirty="0">
-                <a:solidFill>
-                  <a:srgbClr val="5D5D72"/>
-                </a:solidFill>
-                <a:latin typeface="Calibri" pitchFamily="34" charset="0"/>
-                <a:ea typeface="Calibri" pitchFamily="34" charset="-122"/>
-                <a:cs typeface="Calibri" pitchFamily="34" charset="-120"/>
-              </a:rPr>
-              <a:t>2</a:t>
-            </a:r>
-            <a:endParaRPr lang="en-US" sz="900" dirty="0"/>
+          <p:cNvPr id="24" name="cuinotes-footer-mark"/>
+          <p:cNvSpPr txBox="1"/>
+          <p:nvPr/>
+        </p:nvSpPr>
+        <p:spPr>
+          <a:xfrm>
+            <a:off x="9951720" y="6455664"/>
+            <a:ext cx="2011680" cy="292608"/>
+          </a:xfrm>
+          <a:prstGeom prst="rect">
+            <a:avLst/>
+          </a:prstGeom>
+          <a:noFill/>
+        </p:spPr>
+        <p:txBody>
+          <a:bodyPr wrap="none" lIns="0" rIns="0" tIns="0" bIns="0">
+            <a:spAutoFit/>
+          </a:bodyPr>
+          <a:lstStyle/>
+          <a:p>
+            <a:pPr algn="r"/>
+            <a:r>
+              <a:rPr sz="1000">
+                <a:solidFill>
+                  <a:srgbClr val="8A939B"/>
+                </a:solidFill>
+                <a:hlinkClick r:id="rId3"/>
+              </a:rPr>
+              <a:t>cuinotes.com</a:t>
+            </a:r>
+            <a:r>
+              <a:rPr sz="1000">
+                <a:solidFill>
+                  <a:srgbClr val="8A939B"/>
+                </a:solidFill>
+              </a:rPr>
+              <a:t>  ·  2</a:t>
+            </a:r>
           </a:p>
         </p:txBody>
       </p:sp>
@@ -9227,6 +8951,10 @@
             <a:prstDash val="solid"/>
           </a:ln>
         </p:spPr>
+        <p:txBody>
+          <a:bodyPr/>
+          <a:p/>
+        </p:txBody>
       </p:sp>
       <p:sp>
         <p:nvSpPr>
@@ -9308,79 +9036,44 @@
       </p:sp>
       <p:sp>
         <p:nvSpPr>
-          <p:cNvPr id="7" name="Text 5"/>
-          <p:cNvSpPr txBox="1"/>
-          <p:nvPr/>
-        </p:nvSpPr>
-        <p:spPr>
-          <a:xfrm>
-            <a:off x="640080" y="6446520"/>
-            <a:ext cx="8686800" cy="292608"/>
-          </a:xfrm>
-          <a:prstGeom prst="rect">
-            <a:avLst/>
-          </a:prstGeom>
-          <a:noFill/>
-          <a:ln/>
-        </p:spPr>
-        <p:txBody>
-          <a:bodyPr wrap="square" lIns="0" tIns="0" rIns="0" bIns="0" rtlCol="0" anchor="ctr"/>
-          <a:lstStyle/>
-          <a:p>
-            <a:pPr algn="l" indent="0" marL="0">
-              <a:buNone/>
-            </a:pPr>
-            <a:r>
-              <a:rPr lang="en-US" sz="900" dirty="0">
-                <a:solidFill>
-                  <a:srgbClr val="5D5D72"/>
-                </a:solidFill>
-                <a:latin typeface="Calibri" pitchFamily="34" charset="0"/>
-                <a:ea typeface="Calibri" pitchFamily="34" charset="-122"/>
-                <a:cs typeface="Calibri" pitchFamily="34" charset="-120"/>
-              </a:rPr>
-              <a:t>Usman Akram  •  COMSATS University Islamabad</a:t>
-            </a:r>
-            <a:endParaRPr lang="en-US" sz="900" dirty="0"/>
-          </a:p>
-        </p:txBody>
-      </p:sp>
-      <p:sp>
-        <p:nvSpPr>
-          <p:cNvPr id="8" name="Text 6"/>
-          <p:cNvSpPr txBox="1"/>
-          <p:nvPr/>
-        </p:nvSpPr>
-        <p:spPr>
-          <a:xfrm>
-            <a:off x="11155680" y="6446520"/>
-            <a:ext cx="457200" cy="292608"/>
-          </a:xfrm>
-          <a:prstGeom prst="rect">
-            <a:avLst/>
-          </a:prstGeom>
-          <a:noFill/>
-          <a:ln/>
-        </p:spPr>
-        <p:txBody>
-          <a:bodyPr wrap="square" lIns="0" tIns="0" rIns="0" bIns="0" rtlCol="0" anchor="ctr"/>
-          <a:lstStyle/>
-          <a:p>
-            <a:pPr algn="r" indent="0" marL="0">
-              <a:buNone/>
-            </a:pPr>
-            <a:r>
-              <a:rPr lang="en-US" sz="900" dirty="0">
-                <a:solidFill>
-                  <a:srgbClr val="5D5D72"/>
-                </a:solidFill>
-                <a:latin typeface="Calibri" pitchFamily="34" charset="0"/>
-                <a:ea typeface="Calibri" pitchFamily="34" charset="-122"/>
-                <a:cs typeface="Calibri" pitchFamily="34" charset="-120"/>
-              </a:rPr>
-              <a:t>20</a:t>
-            </a:r>
-            <a:endParaRPr lang="en-US" sz="900" dirty="0"/>
+          <p:cNvPr id="9" name="cuinotes-footer-mark"/>
+          <p:cNvSpPr txBox="1"/>
+          <p:nvPr/>
+        </p:nvSpPr>
+        <p:spPr>
+          <a:xfrm>
+            <a:off x="9951720" y="6455664"/>
+            <a:ext cx="2011680" cy="292608"/>
+          </a:xfrm>
+          <a:prstGeom prst="rect">
+            <a:avLst/>
+          </a:prstGeom>
+          <a:noFill/>
+        </p:spPr>
+        <p:txBody>
+          <a:bodyPr wrap="none" lIns="0" rIns="0" tIns="0" bIns="0">
+            <a:spAutoFit/>
+          </a:bodyPr>
+          <a:lstStyle/>
+          <a:p>
+            <a:pPr algn="r"/>
+            <a:r>
+              <a:rPr sz="1000">
+                <a:solidFill>
+                  <a:srgbClr val="8A939B"/>
+                </a:solidFill>
+                <a:hlinkClick r:id="rId3"/>
+              </a:rPr>
+              <a:t>cuinotes.com</a:t>
+            </a:r>
+            <a:r>
+              <a:rPr sz="1000">
+                <a:solidFill>
+                  <a:srgbClr val="8A939B"/>
+                </a:solidFill>
+              </a:rPr>
+              <a:t>  ·  20</a:t>
+            </a:r>
           </a:p>
         </p:txBody>
       </p:sp>
@@ -9515,6 +9208,10 @@
           </a:solidFill>
           <a:ln/>
         </p:spPr>
+        <p:txBody>
+          <a:bodyPr/>
+          <a:p/>
+        </p:txBody>
       </p:sp>
       <p:sp>
         <p:nvSpPr>
@@ -9619,79 +9316,44 @@
       </p:sp>
       <p:sp>
         <p:nvSpPr>
-          <p:cNvPr id="7" name="Text 5"/>
-          <p:cNvSpPr txBox="1"/>
-          <p:nvPr/>
-        </p:nvSpPr>
-        <p:spPr>
-          <a:xfrm>
-            <a:off x="640080" y="6446520"/>
-            <a:ext cx="8686800" cy="292608"/>
-          </a:xfrm>
-          <a:prstGeom prst="rect">
-            <a:avLst/>
-          </a:prstGeom>
-          <a:noFill/>
-          <a:ln/>
-        </p:spPr>
-        <p:txBody>
-          <a:bodyPr wrap="square" lIns="0" tIns="0" rIns="0" bIns="0" rtlCol="0" anchor="ctr"/>
-          <a:lstStyle/>
-          <a:p>
-            <a:pPr algn="l" indent="0" marL="0">
-              <a:buNone/>
-            </a:pPr>
-            <a:r>
-              <a:rPr lang="en-US" sz="900" dirty="0">
-                <a:solidFill>
-                  <a:srgbClr val="5D5D72"/>
-                </a:solidFill>
-                <a:latin typeface="Calibri" pitchFamily="34" charset="0"/>
-                <a:ea typeface="Calibri" pitchFamily="34" charset="-122"/>
-                <a:cs typeface="Calibri" pitchFamily="34" charset="-120"/>
-              </a:rPr>
-              <a:t>Usman Akram  •  COMSATS University Islamabad</a:t>
-            </a:r>
-            <a:endParaRPr lang="en-US" sz="900" dirty="0"/>
-          </a:p>
-        </p:txBody>
-      </p:sp>
-      <p:sp>
-        <p:nvSpPr>
-          <p:cNvPr id="8" name="Text 6"/>
-          <p:cNvSpPr txBox="1"/>
-          <p:nvPr/>
-        </p:nvSpPr>
-        <p:spPr>
-          <a:xfrm>
-            <a:off x="11155680" y="6446520"/>
-            <a:ext cx="457200" cy="292608"/>
-          </a:xfrm>
-          <a:prstGeom prst="rect">
-            <a:avLst/>
-          </a:prstGeom>
-          <a:noFill/>
-          <a:ln/>
-        </p:spPr>
-        <p:txBody>
-          <a:bodyPr wrap="square" lIns="0" tIns="0" rIns="0" bIns="0" rtlCol="0" anchor="ctr"/>
-          <a:lstStyle/>
-          <a:p>
-            <a:pPr algn="r" indent="0" marL="0">
-              <a:buNone/>
-            </a:pPr>
-            <a:r>
-              <a:rPr lang="en-US" sz="900" dirty="0">
-                <a:solidFill>
-                  <a:srgbClr val="5D5D72"/>
-                </a:solidFill>
-                <a:latin typeface="Calibri" pitchFamily="34" charset="0"/>
-                <a:ea typeface="Calibri" pitchFamily="34" charset="-122"/>
-                <a:cs typeface="Calibri" pitchFamily="34" charset="-120"/>
-              </a:rPr>
-              <a:t>21</a:t>
-            </a:r>
-            <a:endParaRPr lang="en-US" sz="900" dirty="0"/>
+          <p:cNvPr id="9" name="cuinotes-footer-mark"/>
+          <p:cNvSpPr txBox="1"/>
+          <p:nvPr/>
+        </p:nvSpPr>
+        <p:spPr>
+          <a:xfrm>
+            <a:off x="9951720" y="6455664"/>
+            <a:ext cx="2011680" cy="292608"/>
+          </a:xfrm>
+          <a:prstGeom prst="rect">
+            <a:avLst/>
+          </a:prstGeom>
+          <a:noFill/>
+        </p:spPr>
+        <p:txBody>
+          <a:bodyPr wrap="none" lIns="0" rIns="0" tIns="0" bIns="0">
+            <a:spAutoFit/>
+          </a:bodyPr>
+          <a:lstStyle/>
+          <a:p>
+            <a:pPr algn="r"/>
+            <a:r>
+              <a:rPr sz="1000">
+                <a:solidFill>
+                  <a:srgbClr val="8A939B"/>
+                </a:solidFill>
+                <a:hlinkClick r:id="rId3"/>
+              </a:rPr>
+              <a:t>cuinotes.com</a:t>
+            </a:r>
+            <a:r>
+              <a:rPr sz="1000">
+                <a:solidFill>
+                  <a:srgbClr val="8A939B"/>
+                </a:solidFill>
+              </a:rPr>
+              <a:t>  ·  21</a:t>
+            </a:r>
           </a:p>
         </p:txBody>
       </p:sp>
@@ -9826,6 +9488,10 @@
           </a:solidFill>
           <a:ln/>
         </p:spPr>
+        <p:txBody>
+          <a:bodyPr/>
+          <a:p/>
+        </p:txBody>
       </p:sp>
       <p:sp>
         <p:nvSpPr>
@@ -9950,79 +9616,44 @@
       </p:sp>
       <p:sp>
         <p:nvSpPr>
-          <p:cNvPr id="7" name="Text 5"/>
-          <p:cNvSpPr txBox="1"/>
-          <p:nvPr/>
-        </p:nvSpPr>
-        <p:spPr>
-          <a:xfrm>
-            <a:off x="640080" y="6446520"/>
-            <a:ext cx="8686800" cy="292608"/>
-          </a:xfrm>
-          <a:prstGeom prst="rect">
-            <a:avLst/>
-          </a:prstGeom>
-          <a:noFill/>
-          <a:ln/>
-        </p:spPr>
-        <p:txBody>
-          <a:bodyPr wrap="square" lIns="0" tIns="0" rIns="0" bIns="0" rtlCol="0" anchor="ctr"/>
-          <a:lstStyle/>
-          <a:p>
-            <a:pPr algn="l" indent="0" marL="0">
-              <a:buNone/>
-            </a:pPr>
-            <a:r>
-              <a:rPr lang="en-US" sz="900" dirty="0">
-                <a:solidFill>
-                  <a:srgbClr val="5D5D72"/>
-                </a:solidFill>
-                <a:latin typeface="Calibri" pitchFamily="34" charset="0"/>
-                <a:ea typeface="Calibri" pitchFamily="34" charset="-122"/>
-                <a:cs typeface="Calibri" pitchFamily="34" charset="-120"/>
-              </a:rPr>
-              <a:t>Usman Akram  •  COMSATS University Islamabad</a:t>
-            </a:r>
-            <a:endParaRPr lang="en-US" sz="900" dirty="0"/>
-          </a:p>
-        </p:txBody>
-      </p:sp>
-      <p:sp>
-        <p:nvSpPr>
-          <p:cNvPr id="8" name="Text 6"/>
-          <p:cNvSpPr txBox="1"/>
-          <p:nvPr/>
-        </p:nvSpPr>
-        <p:spPr>
-          <a:xfrm>
-            <a:off x="11155680" y="6446520"/>
-            <a:ext cx="457200" cy="292608"/>
-          </a:xfrm>
-          <a:prstGeom prst="rect">
-            <a:avLst/>
-          </a:prstGeom>
-          <a:noFill/>
-          <a:ln/>
-        </p:spPr>
-        <p:txBody>
-          <a:bodyPr wrap="square" lIns="0" tIns="0" rIns="0" bIns="0" rtlCol="0" anchor="ctr"/>
-          <a:lstStyle/>
-          <a:p>
-            <a:pPr algn="r" indent="0" marL="0">
-              <a:buNone/>
-            </a:pPr>
-            <a:r>
-              <a:rPr lang="en-US" sz="900" dirty="0">
-                <a:solidFill>
-                  <a:srgbClr val="5D5D72"/>
-                </a:solidFill>
-                <a:latin typeface="Calibri" pitchFamily="34" charset="0"/>
-                <a:ea typeface="Calibri" pitchFamily="34" charset="-122"/>
-                <a:cs typeface="Calibri" pitchFamily="34" charset="-120"/>
-              </a:rPr>
-              <a:t>22</a:t>
-            </a:r>
-            <a:endParaRPr lang="en-US" sz="900" dirty="0"/>
+          <p:cNvPr id="9" name="cuinotes-footer-mark"/>
+          <p:cNvSpPr txBox="1"/>
+          <p:nvPr/>
+        </p:nvSpPr>
+        <p:spPr>
+          <a:xfrm>
+            <a:off x="9951720" y="6455664"/>
+            <a:ext cx="2011680" cy="292608"/>
+          </a:xfrm>
+          <a:prstGeom prst="rect">
+            <a:avLst/>
+          </a:prstGeom>
+          <a:noFill/>
+        </p:spPr>
+        <p:txBody>
+          <a:bodyPr wrap="none" lIns="0" rIns="0" tIns="0" bIns="0">
+            <a:spAutoFit/>
+          </a:bodyPr>
+          <a:lstStyle/>
+          <a:p>
+            <a:pPr algn="r"/>
+            <a:r>
+              <a:rPr sz="1000">
+                <a:solidFill>
+                  <a:srgbClr val="8A939B"/>
+                </a:solidFill>
+                <a:hlinkClick r:id="rId3"/>
+              </a:rPr>
+              <a:t>cuinotes.com</a:t>
+            </a:r>
+            <a:r>
+              <a:rPr sz="1000">
+                <a:solidFill>
+                  <a:srgbClr val="8A939B"/>
+                </a:solidFill>
+              </a:rPr>
+              <a:t>  ·  22</a:t>
+            </a:r>
           </a:p>
         </p:txBody>
       </p:sp>
@@ -10157,6 +9788,10 @@
           </a:solidFill>
           <a:ln/>
         </p:spPr>
+        <p:txBody>
+          <a:bodyPr/>
+          <a:p/>
+        </p:txBody>
       </p:sp>
       <p:sp>
         <p:nvSpPr>
@@ -10241,79 +9876,44 @@
       </p:sp>
       <p:sp>
         <p:nvSpPr>
-          <p:cNvPr id="7" name="Text 5"/>
-          <p:cNvSpPr txBox="1"/>
-          <p:nvPr/>
-        </p:nvSpPr>
-        <p:spPr>
-          <a:xfrm>
-            <a:off x="640080" y="6446520"/>
-            <a:ext cx="8686800" cy="292608"/>
-          </a:xfrm>
-          <a:prstGeom prst="rect">
-            <a:avLst/>
-          </a:prstGeom>
-          <a:noFill/>
-          <a:ln/>
-        </p:spPr>
-        <p:txBody>
-          <a:bodyPr wrap="square" lIns="0" tIns="0" rIns="0" bIns="0" rtlCol="0" anchor="ctr"/>
-          <a:lstStyle/>
-          <a:p>
-            <a:pPr algn="l" indent="0" marL="0">
-              <a:buNone/>
-            </a:pPr>
-            <a:r>
-              <a:rPr lang="en-US" sz="900" dirty="0">
-                <a:solidFill>
-                  <a:srgbClr val="5D5D72"/>
-                </a:solidFill>
-                <a:latin typeface="Calibri" pitchFamily="34" charset="0"/>
-                <a:ea typeface="Calibri" pitchFamily="34" charset="-122"/>
-                <a:cs typeface="Calibri" pitchFamily="34" charset="-120"/>
-              </a:rPr>
-              <a:t>Usman Akram  •  COMSATS University Islamabad</a:t>
-            </a:r>
-            <a:endParaRPr lang="en-US" sz="900" dirty="0"/>
-          </a:p>
-        </p:txBody>
-      </p:sp>
-      <p:sp>
-        <p:nvSpPr>
-          <p:cNvPr id="8" name="Text 6"/>
-          <p:cNvSpPr txBox="1"/>
-          <p:nvPr/>
-        </p:nvSpPr>
-        <p:spPr>
-          <a:xfrm>
-            <a:off x="11155680" y="6446520"/>
-            <a:ext cx="457200" cy="292608"/>
-          </a:xfrm>
-          <a:prstGeom prst="rect">
-            <a:avLst/>
-          </a:prstGeom>
-          <a:noFill/>
-          <a:ln/>
-        </p:spPr>
-        <p:txBody>
-          <a:bodyPr wrap="square" lIns="0" tIns="0" rIns="0" bIns="0" rtlCol="0" anchor="ctr"/>
-          <a:lstStyle/>
-          <a:p>
-            <a:pPr algn="r" indent="0" marL="0">
-              <a:buNone/>
-            </a:pPr>
-            <a:r>
-              <a:rPr lang="en-US" sz="900" dirty="0">
-                <a:solidFill>
-                  <a:srgbClr val="5D5D72"/>
-                </a:solidFill>
-                <a:latin typeface="Calibri" pitchFamily="34" charset="0"/>
-                <a:ea typeface="Calibri" pitchFamily="34" charset="-122"/>
-                <a:cs typeface="Calibri" pitchFamily="34" charset="-120"/>
-              </a:rPr>
-              <a:t>23</a:t>
-            </a:r>
-            <a:endParaRPr lang="en-US" sz="900" dirty="0"/>
+          <p:cNvPr id="9" name="cuinotes-footer-mark"/>
+          <p:cNvSpPr txBox="1"/>
+          <p:nvPr/>
+        </p:nvSpPr>
+        <p:spPr>
+          <a:xfrm>
+            <a:off x="9951720" y="6455664"/>
+            <a:ext cx="2011680" cy="292608"/>
+          </a:xfrm>
+          <a:prstGeom prst="rect">
+            <a:avLst/>
+          </a:prstGeom>
+          <a:noFill/>
+        </p:spPr>
+        <p:txBody>
+          <a:bodyPr wrap="none" lIns="0" rIns="0" tIns="0" bIns="0">
+            <a:spAutoFit/>
+          </a:bodyPr>
+          <a:lstStyle/>
+          <a:p>
+            <a:pPr algn="r"/>
+            <a:r>
+              <a:rPr sz="1000">
+                <a:solidFill>
+                  <a:srgbClr val="8A939B"/>
+                </a:solidFill>
+                <a:hlinkClick r:id="rId3"/>
+              </a:rPr>
+              <a:t>cuinotes.com</a:t>
+            </a:r>
+            <a:r>
+              <a:rPr sz="1000">
+                <a:solidFill>
+                  <a:srgbClr val="8A939B"/>
+                </a:solidFill>
+              </a:rPr>
+              <a:t>  ·  23</a:t>
+            </a:r>
           </a:p>
         </p:txBody>
       </p:sp>
@@ -10448,6 +10048,10 @@
           </a:solidFill>
           <a:ln/>
         </p:spPr>
+        <p:txBody>
+          <a:bodyPr/>
+          <a:p/>
+        </p:txBody>
       </p:sp>
       <p:sp>
         <p:nvSpPr>
@@ -10671,79 +10275,44 @@
       </p:sp>
       <p:sp>
         <p:nvSpPr>
-          <p:cNvPr id="6" name="Text 4"/>
-          <p:cNvSpPr txBox="1"/>
-          <p:nvPr/>
-        </p:nvSpPr>
-        <p:spPr>
-          <a:xfrm>
-            <a:off x="640080" y="6446520"/>
-            <a:ext cx="8686800" cy="292608"/>
-          </a:xfrm>
-          <a:prstGeom prst="rect">
-            <a:avLst/>
-          </a:prstGeom>
-          <a:noFill/>
-          <a:ln/>
-        </p:spPr>
-        <p:txBody>
-          <a:bodyPr wrap="square" lIns="0" tIns="0" rIns="0" bIns="0" rtlCol="0" anchor="ctr"/>
-          <a:lstStyle/>
-          <a:p>
-            <a:pPr algn="l" indent="0" marL="0">
-              <a:buNone/>
-            </a:pPr>
-            <a:r>
-              <a:rPr lang="en-US" sz="900" dirty="0">
-                <a:solidFill>
-                  <a:srgbClr val="5D5D72"/>
-                </a:solidFill>
-                <a:latin typeface="Calibri" pitchFamily="34" charset="0"/>
-                <a:ea typeface="Calibri" pitchFamily="34" charset="-122"/>
-                <a:cs typeface="Calibri" pitchFamily="34" charset="-120"/>
-              </a:rPr>
-              <a:t>Usman Akram  •  COMSATS University Islamabad</a:t>
-            </a:r>
-            <a:endParaRPr lang="en-US" sz="900" dirty="0"/>
-          </a:p>
-        </p:txBody>
-      </p:sp>
-      <p:sp>
-        <p:nvSpPr>
-          <p:cNvPr id="7" name="Text 5"/>
-          <p:cNvSpPr txBox="1"/>
-          <p:nvPr/>
-        </p:nvSpPr>
-        <p:spPr>
-          <a:xfrm>
-            <a:off x="11155680" y="6446520"/>
-            <a:ext cx="457200" cy="292608"/>
-          </a:xfrm>
-          <a:prstGeom prst="rect">
-            <a:avLst/>
-          </a:prstGeom>
-          <a:noFill/>
-          <a:ln/>
-        </p:spPr>
-        <p:txBody>
-          <a:bodyPr wrap="square" lIns="0" tIns="0" rIns="0" bIns="0" rtlCol="0" anchor="ctr"/>
-          <a:lstStyle/>
-          <a:p>
-            <a:pPr algn="r" indent="0" marL="0">
-              <a:buNone/>
-            </a:pPr>
-            <a:r>
-              <a:rPr lang="en-US" sz="900" dirty="0">
-                <a:solidFill>
-                  <a:srgbClr val="5D5D72"/>
-                </a:solidFill>
-                <a:latin typeface="Calibri" pitchFamily="34" charset="0"/>
-                <a:ea typeface="Calibri" pitchFamily="34" charset="-122"/>
-                <a:cs typeface="Calibri" pitchFamily="34" charset="-120"/>
-              </a:rPr>
-              <a:t>24</a:t>
-            </a:r>
-            <a:endParaRPr lang="en-US" sz="900" dirty="0"/>
+          <p:cNvPr id="8" name="cuinotes-footer-mark"/>
+          <p:cNvSpPr txBox="1"/>
+          <p:nvPr/>
+        </p:nvSpPr>
+        <p:spPr>
+          <a:xfrm>
+            <a:off x="9951720" y="6455664"/>
+            <a:ext cx="2011680" cy="292608"/>
+          </a:xfrm>
+          <a:prstGeom prst="rect">
+            <a:avLst/>
+          </a:prstGeom>
+          <a:noFill/>
+        </p:spPr>
+        <p:txBody>
+          <a:bodyPr wrap="none" lIns="0" rIns="0" tIns="0" bIns="0">
+            <a:spAutoFit/>
+          </a:bodyPr>
+          <a:lstStyle/>
+          <a:p>
+            <a:pPr algn="r"/>
+            <a:r>
+              <a:rPr sz="1000">
+                <a:solidFill>
+                  <a:srgbClr val="8A939B"/>
+                </a:solidFill>
+                <a:hlinkClick r:id="rId3"/>
+              </a:rPr>
+              <a:t>cuinotes.com</a:t>
+            </a:r>
+            <a:r>
+              <a:rPr sz="1000">
+                <a:solidFill>
+                  <a:srgbClr val="8A939B"/>
+                </a:solidFill>
+              </a:rPr>
+              <a:t>  ·  24</a:t>
+            </a:r>
           </a:p>
         </p:txBody>
       </p:sp>
@@ -10876,6 +10445,10 @@
           </a:solidFill>
           <a:ln/>
         </p:spPr>
+        <p:txBody>
+          <a:bodyPr/>
+          <a:p/>
+        </p:txBody>
       </p:sp>
       <p:sp>
         <p:nvSpPr>
@@ -10974,6 +10547,10 @@
           </a:solidFill>
           <a:ln/>
         </p:spPr>
+        <p:txBody>
+          <a:bodyPr/>
+          <a:p/>
+        </p:txBody>
       </p:sp>
       <p:sp>
         <p:nvSpPr>
@@ -11072,6 +10649,10 @@
           </a:solidFill>
           <a:ln/>
         </p:spPr>
+        <p:txBody>
+          <a:bodyPr/>
+          <a:p/>
+        </p:txBody>
       </p:sp>
       <p:sp>
         <p:nvSpPr>
@@ -11170,6 +10751,10 @@
           </a:solidFill>
           <a:ln/>
         </p:spPr>
+        <p:txBody>
+          <a:bodyPr/>
+          <a:p/>
+        </p:txBody>
       </p:sp>
       <p:sp>
         <p:nvSpPr>
@@ -11268,6 +10853,10 @@
           </a:solidFill>
           <a:ln/>
         </p:spPr>
+        <p:txBody>
+          <a:bodyPr/>
+          <a:p/>
+        </p:txBody>
       </p:sp>
       <p:sp>
         <p:nvSpPr>
@@ -11349,79 +10938,44 @@
       </p:sp>
       <p:sp>
         <p:nvSpPr>
-          <p:cNvPr id="19" name="Text 17"/>
-          <p:cNvSpPr txBox="1"/>
-          <p:nvPr/>
-        </p:nvSpPr>
-        <p:spPr>
-          <a:xfrm>
-            <a:off x="640080" y="6446520"/>
-            <a:ext cx="8686800" cy="292608"/>
-          </a:xfrm>
-          <a:prstGeom prst="rect">
-            <a:avLst/>
-          </a:prstGeom>
-          <a:noFill/>
-          <a:ln/>
-        </p:spPr>
-        <p:txBody>
-          <a:bodyPr wrap="square" lIns="0" tIns="0" rIns="0" bIns="0" rtlCol="0" anchor="ctr"/>
-          <a:lstStyle/>
-          <a:p>
-            <a:pPr algn="l" indent="0" marL="0">
-              <a:buNone/>
-            </a:pPr>
-            <a:r>
-              <a:rPr lang="en-US" sz="900" dirty="0">
-                <a:solidFill>
-                  <a:srgbClr val="5D5D72"/>
-                </a:solidFill>
-                <a:latin typeface="Calibri" pitchFamily="34" charset="0"/>
-                <a:ea typeface="Calibri" pitchFamily="34" charset="-122"/>
-                <a:cs typeface="Calibri" pitchFamily="34" charset="-120"/>
-              </a:rPr>
-              <a:t>Usman Akram  •  COMSATS University Islamabad</a:t>
-            </a:r>
-            <a:endParaRPr lang="en-US" sz="900" dirty="0"/>
-          </a:p>
-        </p:txBody>
-      </p:sp>
-      <p:sp>
-        <p:nvSpPr>
-          <p:cNvPr id="20" name="Text 18"/>
-          <p:cNvSpPr txBox="1"/>
-          <p:nvPr/>
-        </p:nvSpPr>
-        <p:spPr>
-          <a:xfrm>
-            <a:off x="11155680" y="6446520"/>
-            <a:ext cx="457200" cy="292608"/>
-          </a:xfrm>
-          <a:prstGeom prst="rect">
-            <a:avLst/>
-          </a:prstGeom>
-          <a:noFill/>
-          <a:ln/>
-        </p:spPr>
-        <p:txBody>
-          <a:bodyPr wrap="square" lIns="0" tIns="0" rIns="0" bIns="0" rtlCol="0" anchor="ctr"/>
-          <a:lstStyle/>
-          <a:p>
-            <a:pPr algn="r" indent="0" marL="0">
-              <a:buNone/>
-            </a:pPr>
-            <a:r>
-              <a:rPr lang="en-US" sz="900" dirty="0">
-                <a:solidFill>
-                  <a:srgbClr val="5D5D72"/>
-                </a:solidFill>
-                <a:latin typeface="Calibri" pitchFamily="34" charset="0"/>
-                <a:ea typeface="Calibri" pitchFamily="34" charset="-122"/>
-                <a:cs typeface="Calibri" pitchFamily="34" charset="-120"/>
-              </a:rPr>
-              <a:t>25</a:t>
-            </a:r>
-            <a:endParaRPr lang="en-US" sz="900" dirty="0"/>
+          <p:cNvPr id="21" name="cuinotes-footer-mark"/>
+          <p:cNvSpPr txBox="1"/>
+          <p:nvPr/>
+        </p:nvSpPr>
+        <p:spPr>
+          <a:xfrm>
+            <a:off x="9951720" y="6455664"/>
+            <a:ext cx="2011680" cy="292608"/>
+          </a:xfrm>
+          <a:prstGeom prst="rect">
+            <a:avLst/>
+          </a:prstGeom>
+          <a:noFill/>
+        </p:spPr>
+        <p:txBody>
+          <a:bodyPr wrap="none" lIns="0" rIns="0" tIns="0" bIns="0">
+            <a:spAutoFit/>
+          </a:bodyPr>
+          <a:lstStyle/>
+          <a:p>
+            <a:pPr algn="r"/>
+            <a:r>
+              <a:rPr sz="1000">
+                <a:solidFill>
+                  <a:srgbClr val="8A939B"/>
+                </a:solidFill>
+                <a:hlinkClick r:id="rId3"/>
+              </a:rPr>
+              <a:t>cuinotes.com</a:t>
+            </a:r>
+            <a:r>
+              <a:rPr sz="1000">
+                <a:solidFill>
+                  <a:srgbClr val="8A939B"/>
+                </a:solidFill>
+              </a:rPr>
+              <a:t>  ·  25</a:t>
+            </a:r>
           </a:p>
         </p:txBody>
       </p:sp>
@@ -11556,6 +11110,10 @@
           </a:solidFill>
           <a:ln/>
         </p:spPr>
+        <p:txBody>
+          <a:bodyPr/>
+          <a:p/>
+        </p:txBody>
       </p:sp>
       <p:sp>
         <p:nvSpPr>
@@ -11750,6 +11308,10 @@
             </a:outerShdw>
           </a:effectLst>
         </p:spPr>
+        <p:txBody>
+          <a:bodyPr/>
+          <a:p/>
+        </p:txBody>
       </p:sp>
       <p:pic>
         <p:nvPicPr>
@@ -11777,79 +11339,44 @@
       </p:pic>
       <p:sp>
         <p:nvSpPr>
-          <p:cNvPr id="8" name="Text 5"/>
-          <p:cNvSpPr txBox="1"/>
-          <p:nvPr/>
-        </p:nvSpPr>
-        <p:spPr>
-          <a:xfrm>
-            <a:off x="640080" y="6446520"/>
-            <a:ext cx="8686800" cy="292608"/>
-          </a:xfrm>
-          <a:prstGeom prst="rect">
-            <a:avLst/>
-          </a:prstGeom>
-          <a:noFill/>
-          <a:ln/>
-        </p:spPr>
-        <p:txBody>
-          <a:bodyPr wrap="square" lIns="0" tIns="0" rIns="0" bIns="0" rtlCol="0" anchor="ctr"/>
-          <a:lstStyle/>
-          <a:p>
-            <a:pPr algn="l" indent="0" marL="0">
-              <a:buNone/>
-            </a:pPr>
-            <a:r>
-              <a:rPr lang="en-US" sz="900" dirty="0">
-                <a:solidFill>
-                  <a:srgbClr val="5D5D72"/>
-                </a:solidFill>
-                <a:latin typeface="Calibri" pitchFamily="34" charset="0"/>
-                <a:ea typeface="Calibri" pitchFamily="34" charset="-122"/>
-                <a:cs typeface="Calibri" pitchFamily="34" charset="-120"/>
-              </a:rPr>
-              <a:t>Usman Akram  •  COMSATS University Islamabad</a:t>
-            </a:r>
-            <a:endParaRPr lang="en-US" sz="900" dirty="0"/>
-          </a:p>
-        </p:txBody>
-      </p:sp>
-      <p:sp>
-        <p:nvSpPr>
-          <p:cNvPr id="9" name="Text 6"/>
-          <p:cNvSpPr txBox="1"/>
-          <p:nvPr/>
-        </p:nvSpPr>
-        <p:spPr>
-          <a:xfrm>
-            <a:off x="11155680" y="6446520"/>
-            <a:ext cx="457200" cy="292608"/>
-          </a:xfrm>
-          <a:prstGeom prst="rect">
-            <a:avLst/>
-          </a:prstGeom>
-          <a:noFill/>
-          <a:ln/>
-        </p:spPr>
-        <p:txBody>
-          <a:bodyPr wrap="square" lIns="0" tIns="0" rIns="0" bIns="0" rtlCol="0" anchor="ctr"/>
-          <a:lstStyle/>
-          <a:p>
-            <a:pPr algn="r" indent="0" marL="0">
-              <a:buNone/>
-            </a:pPr>
-            <a:r>
-              <a:rPr lang="en-US" sz="900" dirty="0">
-                <a:solidFill>
-                  <a:srgbClr val="5D5D72"/>
-                </a:solidFill>
-                <a:latin typeface="Calibri" pitchFamily="34" charset="0"/>
-                <a:ea typeface="Calibri" pitchFamily="34" charset="-122"/>
-                <a:cs typeface="Calibri" pitchFamily="34" charset="-120"/>
-              </a:rPr>
-              <a:t>26</a:t>
-            </a:r>
-            <a:endParaRPr lang="en-US" sz="900" dirty="0"/>
+          <p:cNvPr id="10" name="cuinotes-footer-mark"/>
+          <p:cNvSpPr txBox="1"/>
+          <p:nvPr/>
+        </p:nvSpPr>
+        <p:spPr>
+          <a:xfrm>
+            <a:off x="9951720" y="6455664"/>
+            <a:ext cx="2011680" cy="292608"/>
+          </a:xfrm>
+          <a:prstGeom prst="rect">
+            <a:avLst/>
+          </a:prstGeom>
+          <a:noFill/>
+        </p:spPr>
+        <p:txBody>
+          <a:bodyPr wrap="none" lIns="0" rIns="0" tIns="0" bIns="0">
+            <a:spAutoFit/>
+          </a:bodyPr>
+          <a:lstStyle/>
+          <a:p>
+            <a:pPr algn="r"/>
+            <a:r>
+              <a:rPr sz="1000">
+                <a:solidFill>
+                  <a:srgbClr val="8A939B"/>
+                </a:solidFill>
+                <a:hlinkClick r:id="rId4"/>
+              </a:rPr>
+              <a:t>cuinotes.com</a:t>
+            </a:r>
+            <a:r>
+              <a:rPr sz="1000">
+                <a:solidFill>
+                  <a:srgbClr val="8A939B"/>
+                </a:solidFill>
+              </a:rPr>
+              <a:t>  ·  26</a:t>
+            </a:r>
           </a:p>
         </p:txBody>
       </p:sp>
@@ -11986,6 +11513,10 @@
             <a:tailEnd type="triangle"/>
           </a:ln>
         </p:spPr>
+        <p:txBody>
+          <a:bodyPr/>
+          <a:p/>
+        </p:txBody>
       </p:sp>
       <p:sp>
         <p:nvSpPr>
@@ -12068,6 +11599,10 @@
             <a:tailEnd type="triangle"/>
           </a:ln>
         </p:spPr>
+        <p:txBody>
+          <a:bodyPr/>
+          <a:p/>
+        </p:txBody>
       </p:sp>
       <p:sp>
         <p:nvSpPr>
@@ -12146,6 +11681,10 @@
           </a:solidFill>
           <a:ln/>
         </p:spPr>
+        <p:txBody>
+          <a:bodyPr/>
+          <a:p/>
+        </p:txBody>
       </p:sp>
       <p:sp>
         <p:nvSpPr>
@@ -12208,6 +11747,10 @@
           </a:solidFill>
           <a:ln/>
         </p:spPr>
+        <p:txBody>
+          <a:bodyPr/>
+          <a:p/>
+        </p:txBody>
       </p:sp>
       <p:sp>
         <p:nvSpPr>
@@ -12312,79 +11855,44 @@
       </p:sp>
       <p:sp>
         <p:nvSpPr>
-          <p:cNvPr id="13" name="Text 11"/>
-          <p:cNvSpPr txBox="1"/>
-          <p:nvPr/>
-        </p:nvSpPr>
-        <p:spPr>
-          <a:xfrm>
-            <a:off x="640080" y="6446520"/>
-            <a:ext cx="8686800" cy="292608"/>
-          </a:xfrm>
-          <a:prstGeom prst="rect">
-            <a:avLst/>
-          </a:prstGeom>
-          <a:noFill/>
-          <a:ln/>
-        </p:spPr>
-        <p:txBody>
-          <a:bodyPr wrap="square" lIns="0" tIns="0" rIns="0" bIns="0" rtlCol="0" anchor="ctr"/>
-          <a:lstStyle/>
-          <a:p>
-            <a:pPr algn="l" indent="0" marL="0">
-              <a:buNone/>
-            </a:pPr>
-            <a:r>
-              <a:rPr lang="en-US" sz="900" dirty="0">
-                <a:solidFill>
-                  <a:srgbClr val="5D5D72"/>
-                </a:solidFill>
-                <a:latin typeface="Calibri" pitchFamily="34" charset="0"/>
-                <a:ea typeface="Calibri" pitchFamily="34" charset="-122"/>
-                <a:cs typeface="Calibri" pitchFamily="34" charset="-120"/>
-              </a:rPr>
-              <a:t>Usman Akram  •  COMSATS University Islamabad</a:t>
-            </a:r>
-            <a:endParaRPr lang="en-US" sz="900" dirty="0"/>
-          </a:p>
-        </p:txBody>
-      </p:sp>
-      <p:sp>
-        <p:nvSpPr>
-          <p:cNvPr id="14" name="Text 12"/>
-          <p:cNvSpPr txBox="1"/>
-          <p:nvPr/>
-        </p:nvSpPr>
-        <p:spPr>
-          <a:xfrm>
-            <a:off x="11155680" y="6446520"/>
-            <a:ext cx="457200" cy="292608"/>
-          </a:xfrm>
-          <a:prstGeom prst="rect">
-            <a:avLst/>
-          </a:prstGeom>
-          <a:noFill/>
-          <a:ln/>
-        </p:spPr>
-        <p:txBody>
-          <a:bodyPr wrap="square" lIns="0" tIns="0" rIns="0" bIns="0" rtlCol="0" anchor="ctr"/>
-          <a:lstStyle/>
-          <a:p>
-            <a:pPr algn="r" indent="0" marL="0">
-              <a:buNone/>
-            </a:pPr>
-            <a:r>
-              <a:rPr lang="en-US" sz="900" dirty="0">
-                <a:solidFill>
-                  <a:srgbClr val="5D5D72"/>
-                </a:solidFill>
-                <a:latin typeface="Calibri" pitchFamily="34" charset="0"/>
-                <a:ea typeface="Calibri" pitchFamily="34" charset="-122"/>
-                <a:cs typeface="Calibri" pitchFamily="34" charset="-120"/>
-              </a:rPr>
-              <a:t>27</a:t>
-            </a:r>
-            <a:endParaRPr lang="en-US" sz="900" dirty="0"/>
+          <p:cNvPr id="15" name="cuinotes-footer-mark"/>
+          <p:cNvSpPr txBox="1"/>
+          <p:nvPr/>
+        </p:nvSpPr>
+        <p:spPr>
+          <a:xfrm>
+            <a:off x="9951720" y="6455664"/>
+            <a:ext cx="2011680" cy="292608"/>
+          </a:xfrm>
+          <a:prstGeom prst="rect">
+            <a:avLst/>
+          </a:prstGeom>
+          <a:noFill/>
+        </p:spPr>
+        <p:txBody>
+          <a:bodyPr wrap="none" lIns="0" rIns="0" tIns="0" bIns="0">
+            <a:spAutoFit/>
+          </a:bodyPr>
+          <a:lstStyle/>
+          <a:p>
+            <a:pPr algn="r"/>
+            <a:r>
+              <a:rPr sz="1000">
+                <a:solidFill>
+                  <a:srgbClr val="8A939B"/>
+                </a:solidFill>
+                <a:hlinkClick r:id="rId3"/>
+              </a:rPr>
+              <a:t>cuinotes.com</a:t>
+            </a:r>
+            <a:r>
+              <a:rPr sz="1000">
+                <a:solidFill>
+                  <a:srgbClr val="8A939B"/>
+                </a:solidFill>
+              </a:rPr>
+              <a:t>  ·  27</a:t>
+            </a:r>
           </a:p>
         </p:txBody>
       </p:sp>
@@ -12524,6 +12032,10 @@
             <a:prstDash val="solid"/>
           </a:ln>
         </p:spPr>
+        <p:txBody>
+          <a:bodyPr/>
+          <a:p/>
+        </p:txBody>
       </p:sp>
       <p:sp>
         <p:nvSpPr>
@@ -12605,79 +12117,44 @@
       </p:sp>
       <p:sp>
         <p:nvSpPr>
-          <p:cNvPr id="7" name="Text 5"/>
-          <p:cNvSpPr txBox="1"/>
-          <p:nvPr/>
-        </p:nvSpPr>
-        <p:spPr>
-          <a:xfrm>
-            <a:off x="640080" y="6446520"/>
-            <a:ext cx="8686800" cy="292608"/>
-          </a:xfrm>
-          <a:prstGeom prst="rect">
-            <a:avLst/>
-          </a:prstGeom>
-          <a:noFill/>
-          <a:ln/>
-        </p:spPr>
-        <p:txBody>
-          <a:bodyPr wrap="square" lIns="0" tIns="0" rIns="0" bIns="0" rtlCol="0" anchor="ctr"/>
-          <a:lstStyle/>
-          <a:p>
-            <a:pPr algn="l" indent="0" marL="0">
-              <a:buNone/>
-            </a:pPr>
-            <a:r>
-              <a:rPr lang="en-US" sz="900" dirty="0">
-                <a:solidFill>
-                  <a:srgbClr val="5D5D72"/>
-                </a:solidFill>
-                <a:latin typeface="Calibri" pitchFamily="34" charset="0"/>
-                <a:ea typeface="Calibri" pitchFamily="34" charset="-122"/>
-                <a:cs typeface="Calibri" pitchFamily="34" charset="-120"/>
-              </a:rPr>
-              <a:t>Usman Akram  •  COMSATS University Islamabad</a:t>
-            </a:r>
-            <a:endParaRPr lang="en-US" sz="900" dirty="0"/>
-          </a:p>
-        </p:txBody>
-      </p:sp>
-      <p:sp>
-        <p:nvSpPr>
-          <p:cNvPr id="8" name="Text 6"/>
-          <p:cNvSpPr txBox="1"/>
-          <p:nvPr/>
-        </p:nvSpPr>
-        <p:spPr>
-          <a:xfrm>
-            <a:off x="11155680" y="6446520"/>
-            <a:ext cx="457200" cy="292608"/>
-          </a:xfrm>
-          <a:prstGeom prst="rect">
-            <a:avLst/>
-          </a:prstGeom>
-          <a:noFill/>
-          <a:ln/>
-        </p:spPr>
-        <p:txBody>
-          <a:bodyPr wrap="square" lIns="0" tIns="0" rIns="0" bIns="0" rtlCol="0" anchor="ctr"/>
-          <a:lstStyle/>
-          <a:p>
-            <a:pPr algn="r" indent="0" marL="0">
-              <a:buNone/>
-            </a:pPr>
-            <a:r>
-              <a:rPr lang="en-US" sz="900" dirty="0">
-                <a:solidFill>
-                  <a:srgbClr val="5D5D72"/>
-                </a:solidFill>
-                <a:latin typeface="Calibri" pitchFamily="34" charset="0"/>
-                <a:ea typeface="Calibri" pitchFamily="34" charset="-122"/>
-                <a:cs typeface="Calibri" pitchFamily="34" charset="-120"/>
-              </a:rPr>
-              <a:t>28</a:t>
-            </a:r>
-            <a:endParaRPr lang="en-US" sz="900" dirty="0"/>
+          <p:cNvPr id="9" name="cuinotes-footer-mark"/>
+          <p:cNvSpPr txBox="1"/>
+          <p:nvPr/>
+        </p:nvSpPr>
+        <p:spPr>
+          <a:xfrm>
+            <a:off x="9951720" y="6455664"/>
+            <a:ext cx="2011680" cy="292608"/>
+          </a:xfrm>
+          <a:prstGeom prst="rect">
+            <a:avLst/>
+          </a:prstGeom>
+          <a:noFill/>
+        </p:spPr>
+        <p:txBody>
+          <a:bodyPr wrap="none" lIns="0" rIns="0" tIns="0" bIns="0">
+            <a:spAutoFit/>
+          </a:bodyPr>
+          <a:lstStyle/>
+          <a:p>
+            <a:pPr algn="r"/>
+            <a:r>
+              <a:rPr sz="1000">
+                <a:solidFill>
+                  <a:srgbClr val="8A939B"/>
+                </a:solidFill>
+                <a:hlinkClick r:id="rId3"/>
+              </a:rPr>
+              <a:t>cuinotes.com</a:t>
+            </a:r>
+            <a:r>
+              <a:rPr sz="1000">
+                <a:solidFill>
+                  <a:srgbClr val="8A939B"/>
+                </a:solidFill>
+              </a:rPr>
+              <a:t>  ·  28</a:t>
+            </a:r>
           </a:p>
         </p:txBody>
       </p:sp>
@@ -12817,6 +12294,10 @@
             <a:prstDash val="solid"/>
           </a:ln>
         </p:spPr>
+        <p:txBody>
+          <a:bodyPr/>
+          <a:p/>
+        </p:txBody>
       </p:sp>
       <p:sp>
         <p:nvSpPr>
@@ -12898,79 +12379,44 @@
       </p:sp>
       <p:sp>
         <p:nvSpPr>
-          <p:cNvPr id="7" name="Text 5"/>
-          <p:cNvSpPr txBox="1"/>
-          <p:nvPr/>
-        </p:nvSpPr>
-        <p:spPr>
-          <a:xfrm>
-            <a:off x="640080" y="6446520"/>
-            <a:ext cx="8686800" cy="292608"/>
-          </a:xfrm>
-          <a:prstGeom prst="rect">
-            <a:avLst/>
-          </a:prstGeom>
-          <a:noFill/>
-          <a:ln/>
-        </p:spPr>
-        <p:txBody>
-          <a:bodyPr wrap="square" lIns="0" tIns="0" rIns="0" bIns="0" rtlCol="0" anchor="ctr"/>
-          <a:lstStyle/>
-          <a:p>
-            <a:pPr algn="l" indent="0" marL="0">
-              <a:buNone/>
-            </a:pPr>
-            <a:r>
-              <a:rPr lang="en-US" sz="900" dirty="0">
-                <a:solidFill>
-                  <a:srgbClr val="5D5D72"/>
-                </a:solidFill>
-                <a:latin typeface="Calibri" pitchFamily="34" charset="0"/>
-                <a:ea typeface="Calibri" pitchFamily="34" charset="-122"/>
-                <a:cs typeface="Calibri" pitchFamily="34" charset="-120"/>
-              </a:rPr>
-              <a:t>Usman Akram  •  COMSATS University Islamabad</a:t>
-            </a:r>
-            <a:endParaRPr lang="en-US" sz="900" dirty="0"/>
-          </a:p>
-        </p:txBody>
-      </p:sp>
-      <p:sp>
-        <p:nvSpPr>
-          <p:cNvPr id="8" name="Text 6"/>
-          <p:cNvSpPr txBox="1"/>
-          <p:nvPr/>
-        </p:nvSpPr>
-        <p:spPr>
-          <a:xfrm>
-            <a:off x="11155680" y="6446520"/>
-            <a:ext cx="457200" cy="292608"/>
-          </a:xfrm>
-          <a:prstGeom prst="rect">
-            <a:avLst/>
-          </a:prstGeom>
-          <a:noFill/>
-          <a:ln/>
-        </p:spPr>
-        <p:txBody>
-          <a:bodyPr wrap="square" lIns="0" tIns="0" rIns="0" bIns="0" rtlCol="0" anchor="ctr"/>
-          <a:lstStyle/>
-          <a:p>
-            <a:pPr algn="r" indent="0" marL="0">
-              <a:buNone/>
-            </a:pPr>
-            <a:r>
-              <a:rPr lang="en-US" sz="900" dirty="0">
-                <a:solidFill>
-                  <a:srgbClr val="5D5D72"/>
-                </a:solidFill>
-                <a:latin typeface="Calibri" pitchFamily="34" charset="0"/>
-                <a:ea typeface="Calibri" pitchFamily="34" charset="-122"/>
-                <a:cs typeface="Calibri" pitchFamily="34" charset="-120"/>
-              </a:rPr>
-              <a:t>29</a:t>
-            </a:r>
-            <a:endParaRPr lang="en-US" sz="900" dirty="0"/>
+          <p:cNvPr id="9" name="cuinotes-footer-mark"/>
+          <p:cNvSpPr txBox="1"/>
+          <p:nvPr/>
+        </p:nvSpPr>
+        <p:spPr>
+          <a:xfrm>
+            <a:off x="9951720" y="6455664"/>
+            <a:ext cx="2011680" cy="292608"/>
+          </a:xfrm>
+          <a:prstGeom prst="rect">
+            <a:avLst/>
+          </a:prstGeom>
+          <a:noFill/>
+        </p:spPr>
+        <p:txBody>
+          <a:bodyPr wrap="none" lIns="0" rIns="0" tIns="0" bIns="0">
+            <a:spAutoFit/>
+          </a:bodyPr>
+          <a:lstStyle/>
+          <a:p>
+            <a:pPr algn="r"/>
+            <a:r>
+              <a:rPr sz="1000">
+                <a:solidFill>
+                  <a:srgbClr val="8A939B"/>
+                </a:solidFill>
+                <a:hlinkClick r:id="rId3"/>
+              </a:rPr>
+              <a:t>cuinotes.com</a:t>
+            </a:r>
+            <a:r>
+              <a:rPr sz="1000">
+                <a:solidFill>
+                  <a:srgbClr val="8A939B"/>
+                </a:solidFill>
+              </a:rPr>
+              <a:t>  ·  29</a:t>
+            </a:r>
           </a:p>
         </p:txBody>
       </p:sp>
@@ -13103,6 +12549,10 @@
           </a:solidFill>
           <a:ln/>
         </p:spPr>
+        <p:txBody>
+          <a:bodyPr/>
+          <a:p/>
+        </p:txBody>
       </p:sp>
       <p:sp>
         <p:nvSpPr>
@@ -13201,6 +12651,10 @@
           </a:solidFill>
           <a:ln/>
         </p:spPr>
+        <p:txBody>
+          <a:bodyPr/>
+          <a:p/>
+        </p:txBody>
       </p:sp>
       <p:sp>
         <p:nvSpPr>
@@ -13299,6 +12753,10 @@
           </a:solidFill>
           <a:ln/>
         </p:spPr>
+        <p:txBody>
+          <a:bodyPr/>
+          <a:p/>
+        </p:txBody>
       </p:sp>
       <p:sp>
         <p:nvSpPr>
@@ -13397,6 +12855,10 @@
           </a:solidFill>
           <a:ln/>
         </p:spPr>
+        <p:txBody>
+          <a:bodyPr/>
+          <a:p/>
+        </p:txBody>
       </p:sp>
       <p:sp>
         <p:nvSpPr>
@@ -13478,79 +12940,44 @@
       </p:sp>
       <p:sp>
         <p:nvSpPr>
-          <p:cNvPr id="16" name="Text 14"/>
-          <p:cNvSpPr txBox="1"/>
-          <p:nvPr/>
-        </p:nvSpPr>
-        <p:spPr>
-          <a:xfrm>
-            <a:off x="640080" y="6446520"/>
-            <a:ext cx="8686800" cy="292608"/>
-          </a:xfrm>
-          <a:prstGeom prst="rect">
-            <a:avLst/>
-          </a:prstGeom>
-          <a:noFill/>
-          <a:ln/>
-        </p:spPr>
-        <p:txBody>
-          <a:bodyPr wrap="square" lIns="0" tIns="0" rIns="0" bIns="0" rtlCol="0" anchor="ctr"/>
-          <a:lstStyle/>
-          <a:p>
-            <a:pPr algn="l" indent="0" marL="0">
-              <a:buNone/>
-            </a:pPr>
-            <a:r>
-              <a:rPr lang="en-US" sz="900" dirty="0">
-                <a:solidFill>
-                  <a:srgbClr val="5D5D72"/>
-                </a:solidFill>
-                <a:latin typeface="Calibri" pitchFamily="34" charset="0"/>
-                <a:ea typeface="Calibri" pitchFamily="34" charset="-122"/>
-                <a:cs typeface="Calibri" pitchFamily="34" charset="-120"/>
-              </a:rPr>
-              <a:t>Usman Akram  •  COMSATS University Islamabad</a:t>
-            </a:r>
-            <a:endParaRPr lang="en-US" sz="900" dirty="0"/>
-          </a:p>
-        </p:txBody>
-      </p:sp>
-      <p:sp>
-        <p:nvSpPr>
-          <p:cNvPr id="17" name="Text 15"/>
-          <p:cNvSpPr txBox="1"/>
-          <p:nvPr/>
-        </p:nvSpPr>
-        <p:spPr>
-          <a:xfrm>
-            <a:off x="11155680" y="6446520"/>
-            <a:ext cx="457200" cy="292608"/>
-          </a:xfrm>
-          <a:prstGeom prst="rect">
-            <a:avLst/>
-          </a:prstGeom>
-          <a:noFill/>
-          <a:ln/>
-        </p:spPr>
-        <p:txBody>
-          <a:bodyPr wrap="square" lIns="0" tIns="0" rIns="0" bIns="0" rtlCol="0" anchor="ctr"/>
-          <a:lstStyle/>
-          <a:p>
-            <a:pPr algn="r" indent="0" marL="0">
-              <a:buNone/>
-            </a:pPr>
-            <a:r>
-              <a:rPr lang="en-US" sz="900" dirty="0">
-                <a:solidFill>
-                  <a:srgbClr val="5D5D72"/>
-                </a:solidFill>
-                <a:latin typeface="Calibri" pitchFamily="34" charset="0"/>
-                <a:ea typeface="Calibri" pitchFamily="34" charset="-122"/>
-                <a:cs typeface="Calibri" pitchFamily="34" charset="-120"/>
-              </a:rPr>
-              <a:t>3</a:t>
-            </a:r>
-            <a:endParaRPr lang="en-US" sz="900" dirty="0"/>
+          <p:cNvPr id="18" name="cuinotes-footer-mark"/>
+          <p:cNvSpPr txBox="1"/>
+          <p:nvPr/>
+        </p:nvSpPr>
+        <p:spPr>
+          <a:xfrm>
+            <a:off x="9951720" y="6455664"/>
+            <a:ext cx="2011680" cy="292608"/>
+          </a:xfrm>
+          <a:prstGeom prst="rect">
+            <a:avLst/>
+          </a:prstGeom>
+          <a:noFill/>
+        </p:spPr>
+        <p:txBody>
+          <a:bodyPr wrap="none" lIns="0" rIns="0" tIns="0" bIns="0">
+            <a:spAutoFit/>
+          </a:bodyPr>
+          <a:lstStyle/>
+          <a:p>
+            <a:pPr algn="r"/>
+            <a:r>
+              <a:rPr sz="1000">
+                <a:solidFill>
+                  <a:srgbClr val="8A939B"/>
+                </a:solidFill>
+                <a:hlinkClick r:id="rId3"/>
+              </a:rPr>
+              <a:t>cuinotes.com</a:t>
+            </a:r>
+            <a:r>
+              <a:rPr sz="1000">
+                <a:solidFill>
+                  <a:srgbClr val="8A939B"/>
+                </a:solidFill>
+              </a:rPr>
+              <a:t>  ·  3</a:t>
+            </a:r>
           </a:p>
         </p:txBody>
       </p:sp>
@@ -13683,6 +13110,10 @@
           </a:solidFill>
           <a:ln/>
         </p:spPr>
+        <p:txBody>
+          <a:bodyPr/>
+          <a:p/>
+        </p:txBody>
       </p:sp>
       <p:sp>
         <p:nvSpPr>
@@ -13781,6 +13212,10 @@
           </a:solidFill>
           <a:ln/>
         </p:spPr>
+        <p:txBody>
+          <a:bodyPr/>
+          <a:p/>
+        </p:txBody>
       </p:sp>
       <p:sp>
         <p:nvSpPr>
@@ -13879,6 +13314,10 @@
           </a:solidFill>
           <a:ln/>
         </p:spPr>
+        <p:txBody>
+          <a:bodyPr/>
+          <a:p/>
+        </p:txBody>
       </p:sp>
       <p:sp>
         <p:nvSpPr>
@@ -13977,6 +13416,10 @@
           </a:solidFill>
           <a:ln/>
         </p:spPr>
+        <p:txBody>
+          <a:bodyPr/>
+          <a:p/>
+        </p:txBody>
       </p:sp>
       <p:sp>
         <p:nvSpPr>
@@ -14075,6 +13518,10 @@
           </a:solidFill>
           <a:ln/>
         </p:spPr>
+        <p:txBody>
+          <a:bodyPr/>
+          <a:p/>
+        </p:txBody>
       </p:sp>
       <p:sp>
         <p:nvSpPr>
@@ -14173,6 +13620,10 @@
           </a:solidFill>
           <a:ln/>
         </p:spPr>
+        <p:txBody>
+          <a:bodyPr/>
+          <a:p/>
+        </p:txBody>
       </p:sp>
       <p:sp>
         <p:nvSpPr>
@@ -14254,79 +13705,44 @@
       </p:sp>
       <p:sp>
         <p:nvSpPr>
-          <p:cNvPr id="22" name="Text 20"/>
-          <p:cNvSpPr txBox="1"/>
-          <p:nvPr/>
-        </p:nvSpPr>
-        <p:spPr>
-          <a:xfrm>
-            <a:off x="640080" y="6446520"/>
-            <a:ext cx="8686800" cy="292608"/>
-          </a:xfrm>
-          <a:prstGeom prst="rect">
-            <a:avLst/>
-          </a:prstGeom>
-          <a:noFill/>
-          <a:ln/>
-        </p:spPr>
-        <p:txBody>
-          <a:bodyPr wrap="square" lIns="0" tIns="0" rIns="0" bIns="0" rtlCol="0" anchor="ctr"/>
-          <a:lstStyle/>
-          <a:p>
-            <a:pPr algn="l" indent="0" marL="0">
-              <a:buNone/>
-            </a:pPr>
-            <a:r>
-              <a:rPr lang="en-US" sz="900" dirty="0">
-                <a:solidFill>
-                  <a:srgbClr val="9AA3D8"/>
-                </a:solidFill>
-                <a:latin typeface="Calibri" pitchFamily="34" charset="0"/>
-                <a:ea typeface="Calibri" pitchFamily="34" charset="-122"/>
-                <a:cs typeface="Calibri" pitchFamily="34" charset="-120"/>
-              </a:rPr>
-              <a:t>Usman Akram  •  COMSATS University Islamabad</a:t>
-            </a:r>
-            <a:endParaRPr lang="en-US" sz="900" dirty="0"/>
-          </a:p>
-        </p:txBody>
-      </p:sp>
-      <p:sp>
-        <p:nvSpPr>
-          <p:cNvPr id="23" name="Text 21"/>
-          <p:cNvSpPr txBox="1"/>
-          <p:nvPr/>
-        </p:nvSpPr>
-        <p:spPr>
-          <a:xfrm>
-            <a:off x="11155680" y="6446520"/>
-            <a:ext cx="457200" cy="292608"/>
-          </a:xfrm>
-          <a:prstGeom prst="rect">
-            <a:avLst/>
-          </a:prstGeom>
-          <a:noFill/>
-          <a:ln/>
-        </p:spPr>
-        <p:txBody>
-          <a:bodyPr wrap="square" lIns="0" tIns="0" rIns="0" bIns="0" rtlCol="0" anchor="ctr"/>
-          <a:lstStyle/>
-          <a:p>
-            <a:pPr algn="r" indent="0" marL="0">
-              <a:buNone/>
-            </a:pPr>
-            <a:r>
-              <a:rPr lang="en-US" sz="900" dirty="0">
-                <a:solidFill>
-                  <a:srgbClr val="9AA3D8"/>
-                </a:solidFill>
-                <a:latin typeface="Calibri" pitchFamily="34" charset="0"/>
-                <a:ea typeface="Calibri" pitchFamily="34" charset="-122"/>
-                <a:cs typeface="Calibri" pitchFamily="34" charset="-120"/>
-              </a:rPr>
-              <a:t>30</a:t>
-            </a:r>
-            <a:endParaRPr lang="en-US" sz="900" dirty="0"/>
+          <p:cNvPr id="24" name="cuinotes-footer-mark"/>
+          <p:cNvSpPr txBox="1"/>
+          <p:nvPr/>
+        </p:nvSpPr>
+        <p:spPr>
+          <a:xfrm>
+            <a:off x="9951720" y="6455664"/>
+            <a:ext cx="2011680" cy="292608"/>
+          </a:xfrm>
+          <a:prstGeom prst="rect">
+            <a:avLst/>
+          </a:prstGeom>
+          <a:noFill/>
+        </p:spPr>
+        <p:txBody>
+          <a:bodyPr wrap="none" lIns="0" rIns="0" tIns="0" bIns="0">
+            <a:spAutoFit/>
+          </a:bodyPr>
+          <a:lstStyle/>
+          <a:p>
+            <a:pPr algn="r"/>
+            <a:r>
+              <a:rPr sz="1000">
+                <a:solidFill>
+                  <a:srgbClr val="8A939B"/>
+                </a:solidFill>
+                <a:hlinkClick r:id="rId3"/>
+              </a:rPr>
+              <a:t>cuinotes.com</a:t>
+            </a:r>
+            <a:r>
+              <a:rPr sz="1000">
+                <a:solidFill>
+                  <a:srgbClr val="8A939B"/>
+                </a:solidFill>
+              </a:rPr>
+              <a:t>  ·  30</a:t>
+            </a:r>
           </a:p>
         </p:txBody>
       </p:sp>
@@ -14459,6 +13875,10 @@
           </a:solidFill>
           <a:ln/>
         </p:spPr>
+        <p:txBody>
+          <a:bodyPr/>
+          <a:p/>
+        </p:txBody>
       </p:sp>
       <p:sp>
         <p:nvSpPr>
@@ -14557,6 +13977,10 @@
           </a:solidFill>
           <a:ln/>
         </p:spPr>
+        <p:txBody>
+          <a:bodyPr/>
+          <a:p/>
+        </p:txBody>
       </p:sp>
       <p:sp>
         <p:nvSpPr>
@@ -14655,6 +14079,10 @@
           </a:solidFill>
           <a:ln/>
         </p:spPr>
+        <p:txBody>
+          <a:bodyPr/>
+          <a:p/>
+        </p:txBody>
       </p:sp>
       <p:sp>
         <p:nvSpPr>
@@ -14753,6 +14181,10 @@
           </a:solidFill>
           <a:ln/>
         </p:spPr>
+        <p:txBody>
+          <a:bodyPr/>
+          <a:p/>
+        </p:txBody>
       </p:sp>
       <p:sp>
         <p:nvSpPr>
@@ -14834,79 +14266,44 @@
       </p:sp>
       <p:sp>
         <p:nvSpPr>
-          <p:cNvPr id="16" name="Text 14"/>
-          <p:cNvSpPr txBox="1"/>
-          <p:nvPr/>
-        </p:nvSpPr>
-        <p:spPr>
-          <a:xfrm>
-            <a:off x="640080" y="6446520"/>
-            <a:ext cx="8686800" cy="292608"/>
-          </a:xfrm>
-          <a:prstGeom prst="rect">
-            <a:avLst/>
-          </a:prstGeom>
-          <a:noFill/>
-          <a:ln/>
-        </p:spPr>
-        <p:txBody>
-          <a:bodyPr wrap="square" lIns="0" tIns="0" rIns="0" bIns="0" rtlCol="0" anchor="ctr"/>
-          <a:lstStyle/>
-          <a:p>
-            <a:pPr algn="l" indent="0" marL="0">
-              <a:buNone/>
-            </a:pPr>
-            <a:r>
-              <a:rPr lang="en-US" sz="900" dirty="0">
-                <a:solidFill>
-                  <a:srgbClr val="5D5D72"/>
-                </a:solidFill>
-                <a:latin typeface="Calibri" pitchFamily="34" charset="0"/>
-                <a:ea typeface="Calibri" pitchFamily="34" charset="-122"/>
-                <a:cs typeface="Calibri" pitchFamily="34" charset="-120"/>
-              </a:rPr>
-              <a:t>Usman Akram  •  COMSATS University Islamabad</a:t>
-            </a:r>
-            <a:endParaRPr lang="en-US" sz="900" dirty="0"/>
-          </a:p>
-        </p:txBody>
-      </p:sp>
-      <p:sp>
-        <p:nvSpPr>
-          <p:cNvPr id="17" name="Text 15"/>
-          <p:cNvSpPr txBox="1"/>
-          <p:nvPr/>
-        </p:nvSpPr>
-        <p:spPr>
-          <a:xfrm>
-            <a:off x="11155680" y="6446520"/>
-            <a:ext cx="457200" cy="292608"/>
-          </a:xfrm>
-          <a:prstGeom prst="rect">
-            <a:avLst/>
-          </a:prstGeom>
-          <a:noFill/>
-          <a:ln/>
-        </p:spPr>
-        <p:txBody>
-          <a:bodyPr wrap="square" lIns="0" tIns="0" rIns="0" bIns="0" rtlCol="0" anchor="ctr"/>
-          <a:lstStyle/>
-          <a:p>
-            <a:pPr algn="r" indent="0" marL="0">
-              <a:buNone/>
-            </a:pPr>
-            <a:r>
-              <a:rPr lang="en-US" sz="900" dirty="0">
-                <a:solidFill>
-                  <a:srgbClr val="5D5D72"/>
-                </a:solidFill>
-                <a:latin typeface="Calibri" pitchFamily="34" charset="0"/>
-                <a:ea typeface="Calibri" pitchFamily="34" charset="-122"/>
-                <a:cs typeface="Calibri" pitchFamily="34" charset="-120"/>
-              </a:rPr>
-              <a:t>4</a:t>
-            </a:r>
-            <a:endParaRPr lang="en-US" sz="900" dirty="0"/>
+          <p:cNvPr id="18" name="cuinotes-footer-mark"/>
+          <p:cNvSpPr txBox="1"/>
+          <p:nvPr/>
+        </p:nvSpPr>
+        <p:spPr>
+          <a:xfrm>
+            <a:off x="9951720" y="6455664"/>
+            <a:ext cx="2011680" cy="292608"/>
+          </a:xfrm>
+          <a:prstGeom prst="rect">
+            <a:avLst/>
+          </a:prstGeom>
+          <a:noFill/>
+        </p:spPr>
+        <p:txBody>
+          <a:bodyPr wrap="none" lIns="0" rIns="0" tIns="0" bIns="0">
+            <a:spAutoFit/>
+          </a:bodyPr>
+          <a:lstStyle/>
+          <a:p>
+            <a:pPr algn="r"/>
+            <a:r>
+              <a:rPr sz="1000">
+                <a:solidFill>
+                  <a:srgbClr val="8A939B"/>
+                </a:solidFill>
+                <a:hlinkClick r:id="rId3"/>
+              </a:rPr>
+              <a:t>cuinotes.com</a:t>
+            </a:r>
+            <a:r>
+              <a:rPr sz="1000">
+                <a:solidFill>
+                  <a:srgbClr val="8A939B"/>
+                </a:solidFill>
+              </a:rPr>
+              <a:t>  ·  4</a:t>
+            </a:r>
           </a:p>
         </p:txBody>
       </p:sp>
@@ -15046,6 +14443,10 @@
             <a:prstDash val="solid"/>
           </a:ln>
         </p:spPr>
+        <p:txBody>
+          <a:bodyPr/>
+          <a:p/>
+        </p:txBody>
       </p:sp>
       <p:sp>
         <p:nvSpPr>
@@ -15127,79 +14528,44 @@
       </p:sp>
       <p:sp>
         <p:nvSpPr>
-          <p:cNvPr id="7" name="Text 5"/>
-          <p:cNvSpPr txBox="1"/>
-          <p:nvPr/>
-        </p:nvSpPr>
-        <p:spPr>
-          <a:xfrm>
-            <a:off x="640080" y="6446520"/>
-            <a:ext cx="8686800" cy="292608"/>
-          </a:xfrm>
-          <a:prstGeom prst="rect">
-            <a:avLst/>
-          </a:prstGeom>
-          <a:noFill/>
-          <a:ln/>
-        </p:spPr>
-        <p:txBody>
-          <a:bodyPr wrap="square" lIns="0" tIns="0" rIns="0" bIns="0" rtlCol="0" anchor="ctr"/>
-          <a:lstStyle/>
-          <a:p>
-            <a:pPr algn="l" indent="0" marL="0">
-              <a:buNone/>
-            </a:pPr>
-            <a:r>
-              <a:rPr lang="en-US" sz="900" dirty="0">
-                <a:solidFill>
-                  <a:srgbClr val="5D5D72"/>
-                </a:solidFill>
-                <a:latin typeface="Calibri" pitchFamily="34" charset="0"/>
-                <a:ea typeface="Calibri" pitchFamily="34" charset="-122"/>
-                <a:cs typeface="Calibri" pitchFamily="34" charset="-120"/>
-              </a:rPr>
-              <a:t>Usman Akram  •  COMSATS University Islamabad</a:t>
-            </a:r>
-            <a:endParaRPr lang="en-US" sz="900" dirty="0"/>
-          </a:p>
-        </p:txBody>
-      </p:sp>
-      <p:sp>
-        <p:nvSpPr>
-          <p:cNvPr id="8" name="Text 6"/>
-          <p:cNvSpPr txBox="1"/>
-          <p:nvPr/>
-        </p:nvSpPr>
-        <p:spPr>
-          <a:xfrm>
-            <a:off x="11155680" y="6446520"/>
-            <a:ext cx="457200" cy="292608"/>
-          </a:xfrm>
-          <a:prstGeom prst="rect">
-            <a:avLst/>
-          </a:prstGeom>
-          <a:noFill/>
-          <a:ln/>
-        </p:spPr>
-        <p:txBody>
-          <a:bodyPr wrap="square" lIns="0" tIns="0" rIns="0" bIns="0" rtlCol="0" anchor="ctr"/>
-          <a:lstStyle/>
-          <a:p>
-            <a:pPr algn="r" indent="0" marL="0">
-              <a:buNone/>
-            </a:pPr>
-            <a:r>
-              <a:rPr lang="en-US" sz="900" dirty="0">
-                <a:solidFill>
-                  <a:srgbClr val="5D5D72"/>
-                </a:solidFill>
-                <a:latin typeface="Calibri" pitchFamily="34" charset="0"/>
-                <a:ea typeface="Calibri" pitchFamily="34" charset="-122"/>
-                <a:cs typeface="Calibri" pitchFamily="34" charset="-120"/>
-              </a:rPr>
-              <a:t>5</a:t>
-            </a:r>
-            <a:endParaRPr lang="en-US" sz="900" dirty="0"/>
+          <p:cNvPr id="9" name="cuinotes-footer-mark"/>
+          <p:cNvSpPr txBox="1"/>
+          <p:nvPr/>
+        </p:nvSpPr>
+        <p:spPr>
+          <a:xfrm>
+            <a:off x="9951720" y="6455664"/>
+            <a:ext cx="2011680" cy="292608"/>
+          </a:xfrm>
+          <a:prstGeom prst="rect">
+            <a:avLst/>
+          </a:prstGeom>
+          <a:noFill/>
+        </p:spPr>
+        <p:txBody>
+          <a:bodyPr wrap="none" lIns="0" rIns="0" tIns="0" bIns="0">
+            <a:spAutoFit/>
+          </a:bodyPr>
+          <a:lstStyle/>
+          <a:p>
+            <a:pPr algn="r"/>
+            <a:r>
+              <a:rPr sz="1000">
+                <a:solidFill>
+                  <a:srgbClr val="8A939B"/>
+                </a:solidFill>
+                <a:hlinkClick r:id="rId3"/>
+              </a:rPr>
+              <a:t>cuinotes.com</a:t>
+            </a:r>
+            <a:r>
+              <a:rPr sz="1000">
+                <a:solidFill>
+                  <a:srgbClr val="8A939B"/>
+                </a:solidFill>
+              </a:rPr>
+              <a:t>  ·  5</a:t>
+            </a:r>
           </a:p>
         </p:txBody>
       </p:sp>
@@ -16365,79 +15731,44 @@
       </p:graphicFrame>
       <p:sp>
         <p:nvSpPr>
-          <p:cNvPr id="5" name="Text 2"/>
-          <p:cNvSpPr txBox="1"/>
-          <p:nvPr/>
-        </p:nvSpPr>
-        <p:spPr>
-          <a:xfrm>
-            <a:off x="640080" y="6446520"/>
-            <a:ext cx="8686800" cy="292608"/>
-          </a:xfrm>
-          <a:prstGeom prst="rect">
-            <a:avLst/>
-          </a:prstGeom>
-          <a:noFill/>
-          <a:ln/>
-        </p:spPr>
-        <p:txBody>
-          <a:bodyPr wrap="square" lIns="0" tIns="0" rIns="0" bIns="0" rtlCol="0" anchor="ctr"/>
-          <a:lstStyle/>
-          <a:p>
-            <a:pPr algn="l" indent="0" marL="0">
-              <a:buNone/>
-            </a:pPr>
-            <a:r>
-              <a:rPr lang="en-US" sz="900" dirty="0">
-                <a:solidFill>
-                  <a:srgbClr val="5D5D72"/>
-                </a:solidFill>
-                <a:latin typeface="Calibri" pitchFamily="34" charset="0"/>
-                <a:ea typeface="Calibri" pitchFamily="34" charset="-122"/>
-                <a:cs typeface="Calibri" pitchFamily="34" charset="-120"/>
-              </a:rPr>
-              <a:t>Usman Akram  •  COMSATS University Islamabad</a:t>
-            </a:r>
-            <a:endParaRPr lang="en-US" sz="900" dirty="0"/>
-          </a:p>
-        </p:txBody>
-      </p:sp>
-      <p:sp>
-        <p:nvSpPr>
-          <p:cNvPr id="6" name="Text 3"/>
-          <p:cNvSpPr txBox="1"/>
-          <p:nvPr/>
-        </p:nvSpPr>
-        <p:spPr>
-          <a:xfrm>
-            <a:off x="11155680" y="6446520"/>
-            <a:ext cx="457200" cy="292608"/>
-          </a:xfrm>
-          <a:prstGeom prst="rect">
-            <a:avLst/>
-          </a:prstGeom>
-          <a:noFill/>
-          <a:ln/>
-        </p:spPr>
-        <p:txBody>
-          <a:bodyPr wrap="square" lIns="0" tIns="0" rIns="0" bIns="0" rtlCol="0" anchor="ctr"/>
-          <a:lstStyle/>
-          <a:p>
-            <a:pPr algn="r" indent="0" marL="0">
-              <a:buNone/>
-            </a:pPr>
-            <a:r>
-              <a:rPr lang="en-US" sz="900" dirty="0">
-                <a:solidFill>
-                  <a:srgbClr val="5D5D72"/>
-                </a:solidFill>
-                <a:latin typeface="Calibri" pitchFamily="34" charset="0"/>
-                <a:ea typeface="Calibri" pitchFamily="34" charset="-122"/>
-                <a:cs typeface="Calibri" pitchFamily="34" charset="-120"/>
-              </a:rPr>
-              <a:t>6</a:t>
-            </a:r>
-            <a:endParaRPr lang="en-US" sz="900" dirty="0"/>
+          <p:cNvPr id="8" name="cuinotes-footer-mark"/>
+          <p:cNvSpPr txBox="1"/>
+          <p:nvPr/>
+        </p:nvSpPr>
+        <p:spPr>
+          <a:xfrm>
+            <a:off x="9951720" y="6455664"/>
+            <a:ext cx="2011680" cy="292608"/>
+          </a:xfrm>
+          <a:prstGeom prst="rect">
+            <a:avLst/>
+          </a:prstGeom>
+          <a:noFill/>
+        </p:spPr>
+        <p:txBody>
+          <a:bodyPr wrap="none" lIns="0" rIns="0" tIns="0" bIns="0">
+            <a:spAutoFit/>
+          </a:bodyPr>
+          <a:lstStyle/>
+          <a:p>
+            <a:pPr algn="r"/>
+            <a:r>
+              <a:rPr sz="1000">
+                <a:solidFill>
+                  <a:srgbClr val="8A939B"/>
+                </a:solidFill>
+                <a:hlinkClick r:id="rId3"/>
+              </a:rPr>
+              <a:t>cuinotes.com</a:t>
+            </a:r>
+            <a:r>
+              <a:rPr sz="1000">
+                <a:solidFill>
+                  <a:srgbClr val="8A939B"/>
+                </a:solidFill>
+              </a:rPr>
+              <a:t>  ·  6</a:t>
+            </a:r>
           </a:p>
         </p:txBody>
       </p:sp>
@@ -16574,6 +15905,10 @@
             <a:tailEnd type="triangle"/>
           </a:ln>
         </p:spPr>
+        <p:txBody>
+          <a:bodyPr/>
+          <a:p/>
+        </p:txBody>
       </p:sp>
       <p:sp>
         <p:nvSpPr>
@@ -16639,6 +15974,10 @@
             <a:tailEnd type="triangle"/>
           </a:ln>
         </p:spPr>
+        <p:txBody>
+          <a:bodyPr/>
+          <a:p/>
+        </p:txBody>
       </p:sp>
       <p:sp>
         <p:nvSpPr>
@@ -16704,6 +16043,10 @@
             <a:tailEnd type="triangle"/>
           </a:ln>
         </p:spPr>
+        <p:txBody>
+          <a:bodyPr/>
+          <a:p/>
+        </p:txBody>
       </p:sp>
       <p:sp>
         <p:nvSpPr>
@@ -16769,6 +16112,10 @@
             <a:tailEnd type="triangle"/>
           </a:ln>
         </p:spPr>
+        <p:txBody>
+          <a:bodyPr/>
+          <a:p/>
+        </p:txBody>
       </p:sp>
       <p:sp>
         <p:nvSpPr>
@@ -16830,6 +16177,10 @@
           </a:solidFill>
           <a:ln/>
         </p:spPr>
+        <p:txBody>
+          <a:bodyPr/>
+          <a:p/>
+        </p:txBody>
       </p:sp>
       <p:sp>
         <p:nvSpPr>
@@ -16912,6 +16263,10 @@
           </a:solidFill>
           <a:ln/>
         </p:spPr>
+        <p:txBody>
+          <a:bodyPr/>
+          <a:p/>
+        </p:txBody>
       </p:sp>
       <p:sp>
         <p:nvSpPr>
@@ -16994,6 +16349,10 @@
           </a:solidFill>
           <a:ln/>
         </p:spPr>
+        <p:txBody>
+          <a:bodyPr/>
+          <a:p/>
+        </p:txBody>
       </p:sp>
       <p:sp>
         <p:nvSpPr>
@@ -17078,79 +16437,44 @@
       </p:sp>
       <p:sp>
         <p:nvSpPr>
-          <p:cNvPr id="19" name="Text 17"/>
-          <p:cNvSpPr txBox="1"/>
-          <p:nvPr/>
-        </p:nvSpPr>
-        <p:spPr>
-          <a:xfrm>
-            <a:off x="640080" y="6446520"/>
-            <a:ext cx="8686800" cy="292608"/>
-          </a:xfrm>
-          <a:prstGeom prst="rect">
-            <a:avLst/>
-          </a:prstGeom>
-          <a:noFill/>
-          <a:ln/>
-        </p:spPr>
-        <p:txBody>
-          <a:bodyPr wrap="square" lIns="0" tIns="0" rIns="0" bIns="0" rtlCol="0" anchor="ctr"/>
-          <a:lstStyle/>
-          <a:p>
-            <a:pPr algn="l" indent="0" marL="0">
-              <a:buNone/>
-            </a:pPr>
-            <a:r>
-              <a:rPr lang="en-US" sz="900" dirty="0">
-                <a:solidFill>
-                  <a:srgbClr val="5D5D72"/>
-                </a:solidFill>
-                <a:latin typeface="Calibri" pitchFamily="34" charset="0"/>
-                <a:ea typeface="Calibri" pitchFamily="34" charset="-122"/>
-                <a:cs typeface="Calibri" pitchFamily="34" charset="-120"/>
-              </a:rPr>
-              <a:t>Usman Akram  •  COMSATS University Islamabad</a:t>
-            </a:r>
-            <a:endParaRPr lang="en-US" sz="900" dirty="0"/>
-          </a:p>
-        </p:txBody>
-      </p:sp>
-      <p:sp>
-        <p:nvSpPr>
-          <p:cNvPr id="20" name="Text 18"/>
-          <p:cNvSpPr txBox="1"/>
-          <p:nvPr/>
-        </p:nvSpPr>
-        <p:spPr>
-          <a:xfrm>
-            <a:off x="11155680" y="6446520"/>
-            <a:ext cx="457200" cy="292608"/>
-          </a:xfrm>
-          <a:prstGeom prst="rect">
-            <a:avLst/>
-          </a:prstGeom>
-          <a:noFill/>
-          <a:ln/>
-        </p:spPr>
-        <p:txBody>
-          <a:bodyPr wrap="square" lIns="0" tIns="0" rIns="0" bIns="0" rtlCol="0" anchor="ctr"/>
-          <a:lstStyle/>
-          <a:p>
-            <a:pPr algn="r" indent="0" marL="0">
-              <a:buNone/>
-            </a:pPr>
-            <a:r>
-              <a:rPr lang="en-US" sz="900" dirty="0">
-                <a:solidFill>
-                  <a:srgbClr val="5D5D72"/>
-                </a:solidFill>
-                <a:latin typeface="Calibri" pitchFamily="34" charset="0"/>
-                <a:ea typeface="Calibri" pitchFamily="34" charset="-122"/>
-                <a:cs typeface="Calibri" pitchFamily="34" charset="-120"/>
-              </a:rPr>
-              <a:t>7</a:t>
-            </a:r>
-            <a:endParaRPr lang="en-US" sz="900" dirty="0"/>
+          <p:cNvPr id="21" name="cuinotes-footer-mark"/>
+          <p:cNvSpPr txBox="1"/>
+          <p:nvPr/>
+        </p:nvSpPr>
+        <p:spPr>
+          <a:xfrm>
+            <a:off x="9951720" y="6455664"/>
+            <a:ext cx="2011680" cy="292608"/>
+          </a:xfrm>
+          <a:prstGeom prst="rect">
+            <a:avLst/>
+          </a:prstGeom>
+          <a:noFill/>
+        </p:spPr>
+        <p:txBody>
+          <a:bodyPr wrap="none" lIns="0" rIns="0" tIns="0" bIns="0">
+            <a:spAutoFit/>
+          </a:bodyPr>
+          <a:lstStyle/>
+          <a:p>
+            <a:pPr algn="r"/>
+            <a:r>
+              <a:rPr sz="1000">
+                <a:solidFill>
+                  <a:srgbClr val="8A939B"/>
+                </a:solidFill>
+                <a:hlinkClick r:id="rId3"/>
+              </a:rPr>
+              <a:t>cuinotes.com</a:t>
+            </a:r>
+            <a:r>
+              <a:rPr sz="1000">
+                <a:solidFill>
+                  <a:srgbClr val="8A939B"/>
+                </a:solidFill>
+              </a:rPr>
+              <a:t>  ·  7</a:t>
+            </a:r>
           </a:p>
         </p:txBody>
       </p:sp>
@@ -17290,6 +16614,10 @@
             <a:prstDash val="solid"/>
           </a:ln>
         </p:spPr>
+        <p:txBody>
+          <a:bodyPr/>
+          <a:p/>
+        </p:txBody>
       </p:sp>
       <p:sp>
         <p:nvSpPr>
@@ -17441,6 +16769,10 @@
             <a:prstDash val="solid"/>
           </a:ln>
         </p:spPr>
+        <p:txBody>
+          <a:bodyPr/>
+          <a:p/>
+        </p:txBody>
       </p:sp>
       <p:sp>
         <p:nvSpPr>
@@ -17592,6 +16924,10 @@
             <a:prstDash val="solid"/>
           </a:ln>
         </p:spPr>
+        <p:txBody>
+          <a:bodyPr/>
+          <a:p/>
+        </p:txBody>
       </p:sp>
       <p:sp>
         <p:nvSpPr>
@@ -17719,79 +17055,44 @@
       </p:sp>
       <p:sp>
         <p:nvSpPr>
-          <p:cNvPr id="13" name="Text 11"/>
-          <p:cNvSpPr txBox="1"/>
-          <p:nvPr/>
-        </p:nvSpPr>
-        <p:spPr>
-          <a:xfrm>
-            <a:off x="640080" y="6446520"/>
-            <a:ext cx="8686800" cy="292608"/>
-          </a:xfrm>
-          <a:prstGeom prst="rect">
-            <a:avLst/>
-          </a:prstGeom>
-          <a:noFill/>
-          <a:ln/>
-        </p:spPr>
-        <p:txBody>
-          <a:bodyPr wrap="square" lIns="0" tIns="0" rIns="0" bIns="0" rtlCol="0" anchor="ctr"/>
-          <a:lstStyle/>
-          <a:p>
-            <a:pPr algn="l" indent="0" marL="0">
-              <a:buNone/>
-            </a:pPr>
-            <a:r>
-              <a:rPr lang="en-US" sz="900" dirty="0">
-                <a:solidFill>
-                  <a:srgbClr val="5D5D72"/>
-                </a:solidFill>
-                <a:latin typeface="Calibri" pitchFamily="34" charset="0"/>
-                <a:ea typeface="Calibri" pitchFamily="34" charset="-122"/>
-                <a:cs typeface="Calibri" pitchFamily="34" charset="-120"/>
-              </a:rPr>
-              <a:t>Usman Akram  •  COMSATS University Islamabad</a:t>
-            </a:r>
-            <a:endParaRPr lang="en-US" sz="900" dirty="0"/>
-          </a:p>
-        </p:txBody>
-      </p:sp>
-      <p:sp>
-        <p:nvSpPr>
-          <p:cNvPr id="14" name="Text 12"/>
-          <p:cNvSpPr txBox="1"/>
-          <p:nvPr/>
-        </p:nvSpPr>
-        <p:spPr>
-          <a:xfrm>
-            <a:off x="11155680" y="6446520"/>
-            <a:ext cx="457200" cy="292608"/>
-          </a:xfrm>
-          <a:prstGeom prst="rect">
-            <a:avLst/>
-          </a:prstGeom>
-          <a:noFill/>
-          <a:ln/>
-        </p:spPr>
-        <p:txBody>
-          <a:bodyPr wrap="square" lIns="0" tIns="0" rIns="0" bIns="0" rtlCol="0" anchor="ctr"/>
-          <a:lstStyle/>
-          <a:p>
-            <a:pPr algn="r" indent="0" marL="0">
-              <a:buNone/>
-            </a:pPr>
-            <a:r>
-              <a:rPr lang="en-US" sz="900" dirty="0">
-                <a:solidFill>
-                  <a:srgbClr val="5D5D72"/>
-                </a:solidFill>
-                <a:latin typeface="Calibri" pitchFamily="34" charset="0"/>
-                <a:ea typeface="Calibri" pitchFamily="34" charset="-122"/>
-                <a:cs typeface="Calibri" pitchFamily="34" charset="-120"/>
-              </a:rPr>
-              <a:t>8</a:t>
-            </a:r>
-            <a:endParaRPr lang="en-US" sz="900" dirty="0"/>
+          <p:cNvPr id="15" name="cuinotes-footer-mark"/>
+          <p:cNvSpPr txBox="1"/>
+          <p:nvPr/>
+        </p:nvSpPr>
+        <p:spPr>
+          <a:xfrm>
+            <a:off x="9951720" y="6455664"/>
+            <a:ext cx="2011680" cy="292608"/>
+          </a:xfrm>
+          <a:prstGeom prst="rect">
+            <a:avLst/>
+          </a:prstGeom>
+          <a:noFill/>
+        </p:spPr>
+        <p:txBody>
+          <a:bodyPr wrap="none" lIns="0" rIns="0" tIns="0" bIns="0">
+            <a:spAutoFit/>
+          </a:bodyPr>
+          <a:lstStyle/>
+          <a:p>
+            <a:pPr algn="r"/>
+            <a:r>
+              <a:rPr sz="1000">
+                <a:solidFill>
+                  <a:srgbClr val="8A939B"/>
+                </a:solidFill>
+                <a:hlinkClick r:id="rId3"/>
+              </a:rPr>
+              <a:t>cuinotes.com</a:t>
+            </a:r>
+            <a:r>
+              <a:rPr sz="1000">
+                <a:solidFill>
+                  <a:srgbClr val="8A939B"/>
+                </a:solidFill>
+              </a:rPr>
+              <a:t>  ·  8</a:t>
+            </a:r>
           </a:p>
         </p:txBody>
       </p:sp>
@@ -17931,6 +17232,10 @@
             <a:prstDash val="solid"/>
           </a:ln>
         </p:spPr>
+        <p:txBody>
+          <a:bodyPr/>
+          <a:p/>
+        </p:txBody>
       </p:sp>
       <p:sp>
         <p:nvSpPr>
@@ -18012,79 +17317,44 @@
       </p:sp>
       <p:sp>
         <p:nvSpPr>
-          <p:cNvPr id="7" name="Text 5"/>
-          <p:cNvSpPr txBox="1"/>
-          <p:nvPr/>
-        </p:nvSpPr>
-        <p:spPr>
-          <a:xfrm>
-            <a:off x="640080" y="6446520"/>
-            <a:ext cx="8686800" cy="292608"/>
-          </a:xfrm>
-          <a:prstGeom prst="rect">
-            <a:avLst/>
-          </a:prstGeom>
-          <a:noFill/>
-          <a:ln/>
-        </p:spPr>
-        <p:txBody>
-          <a:bodyPr wrap="square" lIns="0" tIns="0" rIns="0" bIns="0" rtlCol="0" anchor="ctr"/>
-          <a:lstStyle/>
-          <a:p>
-            <a:pPr algn="l" indent="0" marL="0">
-              <a:buNone/>
-            </a:pPr>
-            <a:r>
-              <a:rPr lang="en-US" sz="900" dirty="0">
-                <a:solidFill>
-                  <a:srgbClr val="5D5D72"/>
-                </a:solidFill>
-                <a:latin typeface="Calibri" pitchFamily="34" charset="0"/>
-                <a:ea typeface="Calibri" pitchFamily="34" charset="-122"/>
-                <a:cs typeface="Calibri" pitchFamily="34" charset="-120"/>
-              </a:rPr>
-              <a:t>Usman Akram  •  COMSATS University Islamabad</a:t>
-            </a:r>
-            <a:endParaRPr lang="en-US" sz="900" dirty="0"/>
-          </a:p>
-        </p:txBody>
-      </p:sp>
-      <p:sp>
-        <p:nvSpPr>
-          <p:cNvPr id="8" name="Text 6"/>
-          <p:cNvSpPr txBox="1"/>
-          <p:nvPr/>
-        </p:nvSpPr>
-        <p:spPr>
-          <a:xfrm>
-            <a:off x="11155680" y="6446520"/>
-            <a:ext cx="457200" cy="292608"/>
-          </a:xfrm>
-          <a:prstGeom prst="rect">
-            <a:avLst/>
-          </a:prstGeom>
-          <a:noFill/>
-          <a:ln/>
-        </p:spPr>
-        <p:txBody>
-          <a:bodyPr wrap="square" lIns="0" tIns="0" rIns="0" bIns="0" rtlCol="0" anchor="ctr"/>
-          <a:lstStyle/>
-          <a:p>
-            <a:pPr algn="r" indent="0" marL="0">
-              <a:buNone/>
-            </a:pPr>
-            <a:r>
-              <a:rPr lang="en-US" sz="900" dirty="0">
-                <a:solidFill>
-                  <a:srgbClr val="5D5D72"/>
-                </a:solidFill>
-                <a:latin typeface="Calibri" pitchFamily="34" charset="0"/>
-                <a:ea typeface="Calibri" pitchFamily="34" charset="-122"/>
-                <a:cs typeface="Calibri" pitchFamily="34" charset="-120"/>
-              </a:rPr>
-              <a:t>9</a:t>
-            </a:r>
-            <a:endParaRPr lang="en-US" sz="900" dirty="0"/>
+          <p:cNvPr id="9" name="cuinotes-footer-mark"/>
+          <p:cNvSpPr txBox="1"/>
+          <p:nvPr/>
+        </p:nvSpPr>
+        <p:spPr>
+          <a:xfrm>
+            <a:off x="9951720" y="6455664"/>
+            <a:ext cx="2011680" cy="292608"/>
+          </a:xfrm>
+          <a:prstGeom prst="rect">
+            <a:avLst/>
+          </a:prstGeom>
+          <a:noFill/>
+        </p:spPr>
+        <p:txBody>
+          <a:bodyPr wrap="none" lIns="0" rIns="0" tIns="0" bIns="0">
+            <a:spAutoFit/>
+          </a:bodyPr>
+          <a:lstStyle/>
+          <a:p>
+            <a:pPr algn="r"/>
+            <a:r>
+              <a:rPr sz="1000">
+                <a:solidFill>
+                  <a:srgbClr val="8A939B"/>
+                </a:solidFill>
+                <a:hlinkClick r:id="rId3"/>
+              </a:rPr>
+              <a:t>cuinotes.com</a:t>
+            </a:r>
+            <a:r>
+              <a:rPr sz="1000">
+                <a:solidFill>
+                  <a:srgbClr val="8A939B"/>
+                </a:solidFill>
+              </a:rPr>
+              <a:t>  ·  9</a:t>
+            </a:r>
           </a:p>
         </p:txBody>
       </p:sp>

--- a/slides/CSC336-Lecture-16-Introduction-to-Server-Side-Programming.pptx
+++ b/slides/CSC336-Lecture-16-Introduction-to-Server-Side-Programming.pptx
@@ -5990,7 +5990,7 @@
         <p:spPr>
           <a:xfrm>
             <a:off x="640080" y="1965960"/>
-            <a:ext cx="10911535" cy="1554480"/>
+            <a:ext cx="10911535" cy="3657600"/>
           </a:xfrm>
           <a:prstGeom prst="roundRect">
             <a:avLst>
@@ -6021,7 +6021,7 @@
         <p:spPr>
           <a:xfrm>
             <a:off x="868680" y="2103120"/>
-            <a:ext cx="10454335" cy="274320"/>
+            <a:ext cx="10454335" cy="400000"/>
           </a:xfrm>
           <a:prstGeom prst="rect">
             <a:avLst/>
@@ -6037,7 +6037,7 @@
               <a:buNone/>
             </a:pPr>
             <a:r>
-              <a:rPr lang="en-US" sz="1000" b="1" spc="200" kern="0" dirty="0">
+              <a:rPr lang="en-US" sz="1800" b="1" spc="200" kern="0" dirty="0">
                 <a:solidFill>
                   <a:srgbClr val="1F7A46"/>
                 </a:solidFill>
@@ -6047,7 +6047,7 @@
               </a:rPr>
               <a:t>TIP</a:t>
             </a:r>
-            <a:endParaRPr lang="en-US" sz="1000" dirty="0"/>
+            <a:endParaRPr lang="en-US" sz="1800" dirty="0"/>
           </a:p>
         </p:txBody>
       </p:sp>
@@ -6059,24 +6059,24 @@
         </p:nvSpPr>
         <p:spPr>
           <a:xfrm>
-            <a:off x="868680" y="2404872"/>
-            <a:ext cx="10454335" cy="960120"/>
-          </a:xfrm>
-          <a:prstGeom prst="rect">
-            <a:avLst/>
-          </a:prstGeom>
-          <a:noFill/>
-          <a:ln/>
-        </p:spPr>
-        <p:txBody>
-          <a:bodyPr wrap="square" lIns="0" tIns="0" rIns="0" bIns="0" rtlCol="0" anchor="t"/>
+            <a:off x="868680" y="2795960"/>
+            <a:ext cx="10454335" cy="2723600"/>
+          </a:xfrm>
+          <a:prstGeom prst="rect">
+            <a:avLst/>
+          </a:prstGeom>
+          <a:noFill/>
+          <a:ln/>
+        </p:spPr>
+        <p:txBody>
+          <a:bodyPr wrap="square" lIns="0" tIns="0" rIns="0" bIns="0" rtlCol="0" anchor="ctr"/>
           <a:lstStyle/>
           <a:p>
             <a:pPr indent="0" marL="0">
               <a:buNone/>
             </a:pPr>
             <a:r>
-              <a:rPr lang="en-US" sz="1250" dirty="0">
+              <a:rPr lang="en-US" sz="2800" dirty="0">
                 <a:solidFill>
                   <a:srgbClr val="26262F"/>
                 </a:solidFill>
@@ -6086,7 +6086,7 @@
               </a:rPr>
               <a:t>Server-side Node.js code is full of non-blocking operations -- reading files, querying databases, calling other APIs -- and you will use async/await constantly to write that code cleanly.</a:t>
             </a:r>
-            <a:endParaRPr lang="en-US" sz="1250" dirty="0"/>
+            <a:endParaRPr lang="en-US" sz="2800" dirty="0"/>
           </a:p>
         </p:txBody>
       </p:sp>
@@ -6252,7 +6252,7 @@
         <p:spPr>
           <a:xfrm>
             <a:off x="640080" y="1965960"/>
-            <a:ext cx="10911535" cy="1828800"/>
+            <a:ext cx="10911535" cy="3657600"/>
           </a:xfrm>
           <a:prstGeom prst="roundRect">
             <a:avLst>
@@ -6283,7 +6283,7 @@
         <p:spPr>
           <a:xfrm>
             <a:off x="868680" y="2103120"/>
-            <a:ext cx="10454335" cy="274320"/>
+            <a:ext cx="10454335" cy="400000"/>
           </a:xfrm>
           <a:prstGeom prst="rect">
             <a:avLst/>
@@ -6299,7 +6299,7 @@
               <a:buNone/>
             </a:pPr>
             <a:r>
-              <a:rPr lang="en-US" sz="1000" b="1" spc="200" kern="0" dirty="0">
+              <a:rPr lang="en-US" sz="1800" b="1" spc="200" kern="0" dirty="0">
                 <a:solidFill>
                   <a:srgbClr val="8A3A12"/>
                 </a:solidFill>
@@ -6309,7 +6309,7 @@
               </a:rPr>
               <a:t>WARNING</a:t>
             </a:r>
-            <a:endParaRPr lang="en-US" sz="1000" dirty="0"/>
+            <a:endParaRPr lang="en-US" sz="1800" dirty="0"/>
           </a:p>
         </p:txBody>
       </p:sp>
@@ -6321,24 +6321,24 @@
         </p:nvSpPr>
         <p:spPr>
           <a:xfrm>
-            <a:off x="868680" y="2404872"/>
-            <a:ext cx="10454335" cy="1234440"/>
-          </a:xfrm>
-          <a:prstGeom prst="rect">
-            <a:avLst/>
-          </a:prstGeom>
-          <a:noFill/>
-          <a:ln/>
-        </p:spPr>
-        <p:txBody>
-          <a:bodyPr wrap="square" lIns="0" tIns="0" rIns="0" bIns="0" rtlCol="0" anchor="t"/>
+            <a:off x="868680" y="2795960"/>
+            <a:ext cx="10454335" cy="2800000"/>
+          </a:xfrm>
+          <a:prstGeom prst="rect">
+            <a:avLst/>
+          </a:prstGeom>
+          <a:noFill/>
+          <a:ln/>
+        </p:spPr>
+        <p:txBody>
+          <a:bodyPr wrap="square" lIns="0" tIns="0" rIns="0" bIns="0" rtlCol="0" anchor="ctr"/>
           <a:lstStyle/>
           <a:p>
             <a:pPr indent="0" marL="0">
               <a:buNone/>
             </a:pPr>
             <a:r>
-              <a:rPr lang="en-US" sz="1250" dirty="0">
+              <a:rPr lang="en-US" sz="2800" dirty="0">
                 <a:solidFill>
                   <a:srgbClr val="26262F"/>
                 </a:solidFill>
@@ -6348,7 +6348,7 @@
               </a:rPr>
               <a:t>It only helps with waiting on EXTERNAL things (disk, network, database). A huge, slow calculation directly in JavaScript WILL block the single thread and freeze your entire server for every user. Node.js is great at "wait for many slow things at once," not at "crunch huge amounts of pure computation."</a:t>
             </a:r>
-            <a:endParaRPr lang="en-US" sz="1250" dirty="0"/>
+            <a:endParaRPr lang="en-US" sz="2800" dirty="0"/>
           </a:p>
         </p:txBody>
       </p:sp>
@@ -6981,9 +6981,13 @@
             </a:avLst>
           </a:prstGeom>
           <a:solidFill>
-            <a:srgbClr val="1E1E4C"/>
+            <a:srgbClr val="F7F8F9"/>
           </a:solidFill>
-          <a:ln/>
+          <a:ln w="9525">
+            <a:solidFill>
+              <a:srgbClr val="D0D5DD"/>
+            </a:solidFill>
+          </a:ln>
         </p:spPr>
         <p:txBody>
           <a:bodyPr/>
@@ -7020,7 +7024,7 @@
             <a:r>
               <a:rPr lang="en-US" sz="1400" dirty="0">
                 <a:solidFill>
-                  <a:srgbClr val="C9D3F5"/>
+                  <a:srgbClr val="1F2429"/>
                 </a:solidFill>
                 <a:latin typeface="Courier New" pitchFamily="34" charset="0"/>
                 <a:ea typeface="Courier New" pitchFamily="34" charset="-122"/>
@@ -7040,7 +7044,7 @@
             <a:r>
               <a:rPr lang="en-US" sz="1400" dirty="0">
                 <a:solidFill>
-                  <a:srgbClr val="C9D3F5"/>
+                  <a:srgbClr val="1F2429"/>
                 </a:solidFill>
                 <a:latin typeface="Courier New" pitchFamily="34" charset="0"/>
                 <a:ea typeface="Courier New" pitchFamily="34" charset="-122"/>
@@ -7060,7 +7064,7 @@
             <a:r>
               <a:rPr lang="en-US" sz="1400" dirty="0">
                 <a:solidFill>
-                  <a:srgbClr val="C9D3F5"/>
+                  <a:srgbClr val="1F2429"/>
                 </a:solidFill>
                 <a:latin typeface="Courier New" pitchFamily="34" charset="0"/>
                 <a:ea typeface="Courier New" pitchFamily="34" charset="-122"/>
@@ -7080,7 +7084,7 @@
             <a:r>
               <a:rPr lang="en-US" sz="1400" dirty="0">
                 <a:solidFill>
-                  <a:srgbClr val="C9D3F5"/>
+                  <a:srgbClr val="1F2429"/>
                 </a:solidFill>
                 <a:latin typeface="Courier New" pitchFamily="34" charset="0"/>
                 <a:ea typeface="Courier New" pitchFamily="34" charset="-122"/>
@@ -7100,7 +7104,7 @@
             <a:r>
               <a:rPr lang="en-US" sz="1400" dirty="0">
                 <a:solidFill>
-                  <a:srgbClr val="C9D3F5"/>
+                  <a:srgbClr val="1F2429"/>
                 </a:solidFill>
                 <a:latin typeface="Courier New" pitchFamily="34" charset="0"/>
                 <a:ea typeface="Courier New" pitchFamily="34" charset="-122"/>
@@ -7120,7 +7124,7 @@
             <a:r>
               <a:rPr lang="en-US" sz="1400" dirty="0">
                 <a:solidFill>
-                  <a:srgbClr val="C9D3F5"/>
+                  <a:srgbClr val="1F2429"/>
                 </a:solidFill>
                 <a:latin typeface="Courier New" pitchFamily="34" charset="0"/>
                 <a:ea typeface="Courier New" pitchFamily="34" charset="-122"/>
@@ -7140,7 +7144,7 @@
             <a:r>
               <a:rPr lang="en-US" sz="1400" dirty="0">
                 <a:solidFill>
-                  <a:srgbClr val="C9D3F5"/>
+                  <a:srgbClr val="1F2429"/>
                 </a:solidFill>
                 <a:latin typeface="Courier New" pitchFamily="34" charset="0"/>
                 <a:ea typeface="Courier New" pitchFamily="34" charset="-122"/>
@@ -8934,7 +8938,7 @@
         <p:spPr>
           <a:xfrm>
             <a:off x="640080" y="1965960"/>
-            <a:ext cx="10911535" cy="1828800"/>
+            <a:ext cx="10911535" cy="3657600"/>
           </a:xfrm>
           <a:prstGeom prst="roundRect">
             <a:avLst>
@@ -8965,7 +8969,7 @@
         <p:spPr>
           <a:xfrm>
             <a:off x="868680" y="2103120"/>
-            <a:ext cx="10454335" cy="274320"/>
+            <a:ext cx="10454335" cy="400000"/>
           </a:xfrm>
           <a:prstGeom prst="rect">
             <a:avLst/>
@@ -8981,7 +8985,7 @@
               <a:buNone/>
             </a:pPr>
             <a:r>
-              <a:rPr lang="en-US" sz="1000" b="1" spc="200" kern="0" dirty="0">
+              <a:rPr lang="en-US" sz="1800" b="1" spc="200" kern="0" dirty="0">
                 <a:solidFill>
                   <a:srgbClr val="33459E"/>
                 </a:solidFill>
@@ -8991,7 +8995,7 @@
               </a:rPr>
               <a:t>NOTE</a:t>
             </a:r>
-            <a:endParaRPr lang="en-US" sz="1000" dirty="0"/>
+            <a:endParaRPr lang="en-US" sz="1800" dirty="0"/>
           </a:p>
         </p:txBody>
       </p:sp>
@@ -9003,24 +9007,24 @@
         </p:nvSpPr>
         <p:spPr>
           <a:xfrm>
-            <a:off x="868680" y="2404872"/>
-            <a:ext cx="10454335" cy="1234440"/>
-          </a:xfrm>
-          <a:prstGeom prst="rect">
-            <a:avLst/>
-          </a:prstGeom>
-          <a:noFill/>
-          <a:ln/>
-        </p:spPr>
-        <p:txBody>
-          <a:bodyPr wrap="square" lIns="0" tIns="0" rIns="0" bIns="0" rtlCol="0" anchor="t"/>
+            <a:off x="868680" y="2795960"/>
+            <a:ext cx="10454335" cy="2800000"/>
+          </a:xfrm>
+          <a:prstGeom prst="rect">
+            <a:avLst/>
+          </a:prstGeom>
+          <a:noFill/>
+          <a:ln/>
+        </p:spPr>
+        <p:txBody>
+          <a:bodyPr wrap="square" lIns="0" tIns="0" rIns="0" bIns="0" rtlCol="0" anchor="ctr"/>
           <a:lstStyle/>
           <a:p>
             <a:pPr indent="0" marL="0">
               <a:buNone/>
             </a:pPr>
             <a:r>
-              <a:rPr lang="en-US" sz="1250" dirty="0">
+              <a:rPr lang="en-US" sz="2800" dirty="0">
                 <a:solidFill>
                   <a:srgbClr val="26262F"/>
                 </a:solidFill>
@@ -9030,7 +9034,7 @@
               </a:rPr>
               <a:t>This course focuses on Express because it keeps you using JavaScript. The COMSATS course plan also permits Python frameworks like Django and FastAPI, which solve the exact same problems. Routing, request handling, middleware, and status codes apply equally whether you use Express, Django, or FastAPI.</a:t>
             </a:r>
-            <a:endParaRPr lang="en-US" sz="1250" dirty="0"/>
+            <a:endParaRPr lang="en-US" sz="2800" dirty="0"/>
           </a:p>
         </p:txBody>
       </p:sp>
@@ -9204,9 +9208,13 @@
             </a:avLst>
           </a:prstGeom>
           <a:solidFill>
-            <a:srgbClr val="1E1E4C"/>
+            <a:srgbClr val="F7F8F9"/>
           </a:solidFill>
-          <a:ln/>
+          <a:ln w="9525">
+            <a:solidFill>
+              <a:srgbClr val="D0D5DD"/>
+            </a:solidFill>
+          </a:ln>
         </p:spPr>
         <p:txBody>
           <a:bodyPr/>
@@ -9243,7 +9251,7 @@
             <a:r>
               <a:rPr lang="en-US" sz="1400" dirty="0">
                 <a:solidFill>
-                  <a:srgbClr val="C9D3F5"/>
+                  <a:srgbClr val="1F2429"/>
                 </a:solidFill>
                 <a:latin typeface="Courier New" pitchFamily="34" charset="0"/>
                 <a:ea typeface="Courier New" pitchFamily="34" charset="-122"/>
@@ -9263,7 +9271,7 @@
             <a:r>
               <a:rPr lang="en-US" sz="1400" dirty="0">
                 <a:solidFill>
-                  <a:srgbClr val="C9D3F5"/>
+                  <a:srgbClr val="1F2429"/>
                 </a:solidFill>
                 <a:latin typeface="Courier New" pitchFamily="34" charset="0"/>
                 <a:ea typeface="Courier New" pitchFamily="34" charset="-122"/>
@@ -9484,9 +9492,13 @@
             </a:avLst>
           </a:prstGeom>
           <a:solidFill>
-            <a:srgbClr val="1E1E4C"/>
+            <a:srgbClr val="F7F8F9"/>
           </a:solidFill>
-          <a:ln/>
+          <a:ln w="9525">
+            <a:solidFill>
+              <a:srgbClr val="D0D5DD"/>
+            </a:solidFill>
+          </a:ln>
         </p:spPr>
         <p:txBody>
           <a:bodyPr/>
@@ -9523,7 +9535,7 @@
             <a:r>
               <a:rPr lang="en-US" sz="1400" dirty="0">
                 <a:solidFill>
-                  <a:srgbClr val="C9D3F5"/>
+                  <a:srgbClr val="1F2429"/>
                 </a:solidFill>
                 <a:latin typeface="Courier New" pitchFamily="34" charset="0"/>
                 <a:ea typeface="Courier New" pitchFamily="34" charset="-122"/>
@@ -9543,7 +9555,7 @@
             <a:r>
               <a:rPr lang="en-US" sz="1400" dirty="0">
                 <a:solidFill>
-                  <a:srgbClr val="C9D3F5"/>
+                  <a:srgbClr val="1F2429"/>
                 </a:solidFill>
                 <a:latin typeface="Courier New" pitchFamily="34" charset="0"/>
                 <a:ea typeface="Courier New" pitchFamily="34" charset="-122"/>
@@ -9563,7 +9575,7 @@
             <a:r>
               <a:rPr lang="en-US" sz="1400" dirty="0">
                 <a:solidFill>
-                  <a:srgbClr val="C9D3F5"/>
+                  <a:srgbClr val="1F2429"/>
                 </a:solidFill>
                 <a:latin typeface="Courier New" pitchFamily="34" charset="0"/>
                 <a:ea typeface="Courier New" pitchFamily="34" charset="-122"/>
@@ -9784,9 +9796,13 @@
             </a:avLst>
           </a:prstGeom>
           <a:solidFill>
-            <a:srgbClr val="1E1E4C"/>
+            <a:srgbClr val="F7F8F9"/>
           </a:solidFill>
-          <a:ln/>
+          <a:ln w="9525">
+            <a:solidFill>
+              <a:srgbClr val="D0D5DD"/>
+            </a:solidFill>
+          </a:ln>
         </p:spPr>
         <p:txBody>
           <a:bodyPr/>
@@ -9823,7 +9839,7 @@
             <a:r>
               <a:rPr lang="en-US" sz="1400" dirty="0">
                 <a:solidFill>
-                  <a:srgbClr val="C9D3F5"/>
+                  <a:srgbClr val="1F2429"/>
                 </a:solidFill>
                 <a:latin typeface="Courier New" pitchFamily="34" charset="0"/>
                 <a:ea typeface="Courier New" pitchFamily="34" charset="-122"/>
@@ -10044,9 +10060,13 @@
             </a:avLst>
           </a:prstGeom>
           <a:solidFill>
-            <a:srgbClr val="1E1E4C"/>
+            <a:srgbClr val="F7F8F9"/>
           </a:solidFill>
-          <a:ln/>
+          <a:ln w="9525">
+            <a:solidFill>
+              <a:srgbClr val="D0D5DD"/>
+            </a:solidFill>
+          </a:ln>
         </p:spPr>
         <p:txBody>
           <a:bodyPr/>
@@ -10083,7 +10103,7 @@
             <a:r>
               <a:rPr lang="en-US" sz="1400" dirty="0">
                 <a:solidFill>
-                  <a:srgbClr val="C9D3F5"/>
+                  <a:srgbClr val="1F2429"/>
                 </a:solidFill>
                 <a:latin typeface="Courier New" pitchFamily="34" charset="0"/>
                 <a:ea typeface="Courier New" pitchFamily="34" charset="-122"/>
@@ -10103,7 +10123,7 @@
             <a:r>
               <a:rPr lang="en-US" sz="1400" dirty="0">
                 <a:solidFill>
-                  <a:srgbClr val="C9D3F5"/>
+                  <a:srgbClr val="1F2429"/>
                 </a:solidFill>
                 <a:latin typeface="Courier New" pitchFamily="34" charset="0"/>
                 <a:ea typeface="Courier New" pitchFamily="34" charset="-122"/>
@@ -10123,7 +10143,7 @@
             <a:r>
               <a:rPr lang="en-US" sz="1400" dirty="0">
                 <a:solidFill>
-                  <a:srgbClr val="C9D3F5"/>
+                  <a:srgbClr val="1F2429"/>
                 </a:solidFill>
                 <a:latin typeface="Courier New" pitchFamily="34" charset="0"/>
                 <a:ea typeface="Courier New" pitchFamily="34" charset="-122"/>
@@ -10152,7 +10172,7 @@
             <a:r>
               <a:rPr lang="en-US" sz="1400" dirty="0">
                 <a:solidFill>
-                  <a:srgbClr val="C9D3F5"/>
+                  <a:srgbClr val="1F2429"/>
                 </a:solidFill>
                 <a:latin typeface="Courier New" pitchFamily="34" charset="0"/>
                 <a:ea typeface="Courier New" pitchFamily="34" charset="-122"/>
@@ -10172,7 +10192,7 @@
             <a:r>
               <a:rPr lang="en-US" sz="1400" dirty="0">
                 <a:solidFill>
-                  <a:srgbClr val="C9D3F5"/>
+                  <a:srgbClr val="1F2429"/>
                 </a:solidFill>
                 <a:latin typeface="Courier New" pitchFamily="34" charset="0"/>
                 <a:ea typeface="Courier New" pitchFamily="34" charset="-122"/>
@@ -10192,7 +10212,7 @@
             <a:r>
               <a:rPr lang="en-US" sz="1400" dirty="0">
                 <a:solidFill>
-                  <a:srgbClr val="C9D3F5"/>
+                  <a:srgbClr val="1F2429"/>
                 </a:solidFill>
                 <a:latin typeface="Courier New" pitchFamily="34" charset="0"/>
                 <a:ea typeface="Courier New" pitchFamily="34" charset="-122"/>
@@ -10221,7 +10241,7 @@
             <a:r>
               <a:rPr lang="en-US" sz="1400" dirty="0">
                 <a:solidFill>
-                  <a:srgbClr val="C9D3F5"/>
+                  <a:srgbClr val="1F2429"/>
                 </a:solidFill>
                 <a:latin typeface="Courier New" pitchFamily="34" charset="0"/>
                 <a:ea typeface="Courier New" pitchFamily="34" charset="-122"/>
@@ -10241,7 +10261,7 @@
             <a:r>
               <a:rPr lang="en-US" sz="1400" dirty="0">
                 <a:solidFill>
-                  <a:srgbClr val="C9D3F5"/>
+                  <a:srgbClr val="1F2429"/>
                 </a:solidFill>
                 <a:latin typeface="Courier New" pitchFamily="34" charset="0"/>
                 <a:ea typeface="Courier New" pitchFamily="34" charset="-122"/>
@@ -10261,7 +10281,7 @@
             <a:r>
               <a:rPr lang="en-US" sz="1400" dirty="0">
                 <a:solidFill>
-                  <a:srgbClr val="C9D3F5"/>
+                  <a:srgbClr val="1F2429"/>
                 </a:solidFill>
                 <a:latin typeface="Courier New" pitchFamily="34" charset="0"/>
                 <a:ea typeface="Courier New" pitchFamily="34" charset="-122"/>
@@ -11106,9 +11126,13 @@
             </a:avLst>
           </a:prstGeom>
           <a:solidFill>
-            <a:srgbClr val="1E1E4C"/>
+            <a:srgbClr val="F7F8F9"/>
           </a:solidFill>
-          <a:ln/>
+          <a:ln w="9525">
+            <a:solidFill>
+              <a:srgbClr val="D0D5DD"/>
+            </a:solidFill>
+          </a:ln>
         </p:spPr>
         <p:txBody>
           <a:bodyPr/>
@@ -11145,7 +11169,7 @@
             <a:r>
               <a:rPr lang="en-US" sz="1300" dirty="0">
                 <a:solidFill>
-                  <a:srgbClr val="C9D3F5"/>
+                  <a:srgbClr val="1F2429"/>
                 </a:solidFill>
                 <a:latin typeface="Courier New" pitchFamily="34" charset="0"/>
                 <a:ea typeface="Courier New" pitchFamily="34" charset="-122"/>
@@ -11174,7 +11198,7 @@
             <a:r>
               <a:rPr lang="en-US" sz="1300" dirty="0">
                 <a:solidFill>
-                  <a:srgbClr val="C9D3F5"/>
+                  <a:srgbClr val="1F2429"/>
                 </a:solidFill>
                 <a:latin typeface="Courier New" pitchFamily="34" charset="0"/>
                 <a:ea typeface="Courier New" pitchFamily="34" charset="-122"/>
@@ -11194,7 +11218,7 @@
             <a:r>
               <a:rPr lang="en-US" sz="1300" dirty="0">
                 <a:solidFill>
-                  <a:srgbClr val="C9D3F5"/>
+                  <a:srgbClr val="1F2429"/>
                 </a:solidFill>
                 <a:latin typeface="Courier New" pitchFamily="34" charset="0"/>
                 <a:ea typeface="Courier New" pitchFamily="34" charset="-122"/>
@@ -11214,7 +11238,7 @@
             <a:r>
               <a:rPr lang="en-US" sz="1300" dirty="0">
                 <a:solidFill>
-                  <a:srgbClr val="C9D3F5"/>
+                  <a:srgbClr val="1F2429"/>
                 </a:solidFill>
                 <a:latin typeface="Courier New" pitchFamily="34" charset="0"/>
                 <a:ea typeface="Courier New" pitchFamily="34" charset="-122"/>
@@ -11243,7 +11267,7 @@
             <a:r>
               <a:rPr lang="en-US" sz="1300" dirty="0">
                 <a:solidFill>
-                  <a:srgbClr val="C9D3F5"/>
+                  <a:srgbClr val="1F2429"/>
                 </a:solidFill>
                 <a:latin typeface="Courier New" pitchFamily="34" charset="0"/>
                 <a:ea typeface="Courier New" pitchFamily="34" charset="-122"/>
@@ -11263,7 +11287,7 @@
             <a:r>
               <a:rPr lang="en-US" sz="1300" dirty="0">
                 <a:solidFill>
-                  <a:srgbClr val="C9D3F5"/>
+                  <a:srgbClr val="1F2429"/>
                 </a:solidFill>
                 <a:latin typeface="Courier New" pitchFamily="34" charset="0"/>
                 <a:ea typeface="Courier New" pitchFamily="34" charset="-122"/>
@@ -12015,7 +12039,7 @@
         <p:spPr>
           <a:xfrm>
             <a:off x="640080" y="1965960"/>
-            <a:ext cx="10911535" cy="1554480"/>
+            <a:ext cx="10911535" cy="3657600"/>
           </a:xfrm>
           <a:prstGeom prst="roundRect">
             <a:avLst>
@@ -12046,7 +12070,7 @@
         <p:spPr>
           <a:xfrm>
             <a:off x="868680" y="2103120"/>
-            <a:ext cx="10454335" cy="274320"/>
+            <a:ext cx="10454335" cy="400000"/>
           </a:xfrm>
           <a:prstGeom prst="rect">
             <a:avLst/>
@@ -12062,7 +12086,7 @@
               <a:buNone/>
             </a:pPr>
             <a:r>
-              <a:rPr lang="en-US" sz="1000" b="1" spc="200" kern="0" dirty="0">
+              <a:rPr lang="en-US" sz="1800" b="1" spc="200" kern="0" dirty="0">
                 <a:solidFill>
                   <a:srgbClr val="1F7A46"/>
                 </a:solidFill>
@@ -12072,7 +12096,7 @@
               </a:rPr>
               <a:t>TIP</a:t>
             </a:r>
-            <a:endParaRPr lang="en-US" sz="1000" dirty="0"/>
+            <a:endParaRPr lang="en-US" sz="1800" dirty="0"/>
           </a:p>
         </p:txBody>
       </p:sp>
@@ -12084,24 +12108,24 @@
         </p:nvSpPr>
         <p:spPr>
           <a:xfrm>
-            <a:off x="868680" y="2404872"/>
-            <a:ext cx="10454335" cy="960120"/>
-          </a:xfrm>
-          <a:prstGeom prst="rect">
-            <a:avLst/>
-          </a:prstGeom>
-          <a:noFill/>
-          <a:ln/>
-        </p:spPr>
-        <p:txBody>
-          <a:bodyPr wrap="square" lIns="0" tIns="0" rIns="0" bIns="0" rtlCol="0" anchor="t"/>
+            <a:off x="868680" y="2795960"/>
+            <a:ext cx="10454335" cy="2800000"/>
+          </a:xfrm>
+          <a:prstGeom prst="rect">
+            <a:avLst/>
+          </a:prstGeom>
+          <a:noFill/>
+          <a:ln/>
+        </p:spPr>
+        <p:txBody>
+          <a:bodyPr wrap="square" lIns="0" tIns="0" rIns="0" bIns="0" rtlCol="0" anchor="ctr"/>
           <a:lstStyle/>
           <a:p>
             <a:pPr indent="0" marL="0">
               <a:buNone/>
             </a:pPr>
             <a:r>
-              <a:rPr lang="en-US" sz="1250" dirty="0">
+              <a:rPr lang="en-US" sz="2800" dirty="0">
                 <a:solidFill>
                   <a:srgbClr val="26262F"/>
                 </a:solidFill>
@@ -12111,7 +12135,7 @@
               </a:rPr>
               <a:t>localhost is a special hostname that always means "this same computer." While developing, your server and browser both run on your own machine. When you later deploy your app, visitors reach it through a real domain name instead.</a:t>
             </a:r>
-            <a:endParaRPr lang="en-US" sz="1250" dirty="0"/>
+            <a:endParaRPr lang="en-US" sz="2800" dirty="0"/>
           </a:p>
         </p:txBody>
       </p:sp>
@@ -12277,7 +12301,7 @@
         <p:spPr>
           <a:xfrm>
             <a:off x="640080" y="1965960"/>
-            <a:ext cx="10911535" cy="1645920"/>
+            <a:ext cx="10911535" cy="3657600"/>
           </a:xfrm>
           <a:prstGeom prst="roundRect">
             <a:avLst>
@@ -12308,7 +12332,7 @@
         <p:spPr>
           <a:xfrm>
             <a:off x="868680" y="2103120"/>
-            <a:ext cx="10454335" cy="274320"/>
+            <a:ext cx="10454335" cy="400000"/>
           </a:xfrm>
           <a:prstGeom prst="rect">
             <a:avLst/>
@@ -12324,7 +12348,7 @@
               <a:buNone/>
             </a:pPr>
             <a:r>
-              <a:rPr lang="en-US" sz="1000" b="1" spc="200" kern="0" dirty="0">
+              <a:rPr lang="en-US" sz="1800" b="1" spc="200" kern="0" dirty="0">
                 <a:solidFill>
                   <a:srgbClr val="8A3A12"/>
                 </a:solidFill>
@@ -12334,7 +12358,7 @@
               </a:rPr>
               <a:t>WARNING</a:t>
             </a:r>
-            <a:endParaRPr lang="en-US" sz="1000" dirty="0"/>
+            <a:endParaRPr lang="en-US" sz="1800" dirty="0"/>
           </a:p>
         </p:txBody>
       </p:sp>
@@ -12346,24 +12370,24 @@
         </p:nvSpPr>
         <p:spPr>
           <a:xfrm>
-            <a:off x="868680" y="2404872"/>
-            <a:ext cx="10454335" cy="1051560"/>
-          </a:xfrm>
-          <a:prstGeom prst="rect">
-            <a:avLst/>
-          </a:prstGeom>
-          <a:noFill/>
-          <a:ln/>
-        </p:spPr>
-        <p:txBody>
-          <a:bodyPr wrap="square" lIns="0" tIns="0" rIns="0" bIns="0" rtlCol="0" anchor="t"/>
+            <a:off x="868680" y="2795960"/>
+            <a:ext cx="10454335" cy="2800000"/>
+          </a:xfrm>
+          <a:prstGeom prst="rect">
+            <a:avLst/>
+          </a:prstGeom>
+          <a:noFill/>
+          <a:ln/>
+        </p:spPr>
+        <p:txBody>
+          <a:bodyPr wrap="square" lIns="0" tIns="0" rIns="0" bIns="0" rtlCol="0" anchor="ctr"/>
           <a:lstStyle/>
           <a:p>
             <a:pPr indent="0" marL="0">
               <a:buNone/>
             </a:pPr>
             <a:r>
-              <a:rPr lang="en-US" sz="1250" dirty="0">
+              <a:rPr lang="en-US" sz="2800" dirty="0">
                 <a:solidFill>
                   <a:srgbClr val="26262F"/>
                 </a:solidFill>
@@ -12373,7 +12397,7 @@
               </a:rPr>
               <a:t>Two programs cannot listen on the exact same port at the same time. If you see EADDRINUSE, something (perhaps an earlier copy of your own server) is already using that port -- stop it, or choose a different port number.</a:t>
             </a:r>
-            <a:endParaRPr lang="en-US" sz="1250" dirty="0"/>
+            <a:endParaRPr lang="en-US" sz="2800" dirty="0"/>
           </a:p>
         </p:txBody>
       </p:sp>
@@ -14426,7 +14450,7 @@
         <p:spPr>
           <a:xfrm>
             <a:off x="640080" y="1965960"/>
-            <a:ext cx="10911535" cy="1737360"/>
+            <a:ext cx="10911535" cy="3657600"/>
           </a:xfrm>
           <a:prstGeom prst="roundRect">
             <a:avLst>
@@ -14457,7 +14481,7 @@
         <p:spPr>
           <a:xfrm>
             <a:off x="868680" y="2103120"/>
-            <a:ext cx="10454335" cy="274320"/>
+            <a:ext cx="10454335" cy="400000"/>
           </a:xfrm>
           <a:prstGeom prst="rect">
             <a:avLst/>
@@ -14473,7 +14497,7 @@
               <a:buNone/>
             </a:pPr>
             <a:r>
-              <a:rPr lang="en-US" sz="1000" b="1" spc="200" kern="0" dirty="0">
+              <a:rPr lang="en-US" sz="1800" b="1" spc="200" kern="0" dirty="0">
                 <a:solidFill>
                   <a:srgbClr val="33459E"/>
                 </a:solidFill>
@@ -14483,7 +14507,7 @@
               </a:rPr>
               <a:t>NOTE</a:t>
             </a:r>
-            <a:endParaRPr lang="en-US" sz="1000" dirty="0"/>
+            <a:endParaRPr lang="en-US" sz="1800" dirty="0"/>
           </a:p>
         </p:txBody>
       </p:sp>
@@ -14495,24 +14519,24 @@
         </p:nvSpPr>
         <p:spPr>
           <a:xfrm>
-            <a:off x="868680" y="2404872"/>
-            <a:ext cx="10454335" cy="1143000"/>
-          </a:xfrm>
-          <a:prstGeom prst="rect">
-            <a:avLst/>
-          </a:prstGeom>
-          <a:noFill/>
-          <a:ln/>
-        </p:spPr>
-        <p:txBody>
-          <a:bodyPr wrap="square" lIns="0" tIns="0" rIns="0" bIns="0" rtlCol="0" anchor="t"/>
+            <a:off x="868680" y="2795960"/>
+            <a:ext cx="10454335" cy="2800000"/>
+          </a:xfrm>
+          <a:prstGeom prst="rect">
+            <a:avLst/>
+          </a:prstGeom>
+          <a:noFill/>
+          <a:ln/>
+        </p:spPr>
+        <p:txBody>
+          <a:bodyPr wrap="square" lIns="0" tIns="0" rIns="0" bIns="0" rtlCol="0" anchor="ctr"/>
           <a:lstStyle/>
           <a:p>
             <a:pPr indent="0" marL="0">
               <a:buNone/>
             </a:pPr>
             <a:r>
-              <a:rPr lang="en-US" sz="1250" dirty="0">
+              <a:rPr lang="en-US" sz="2800" dirty="0">
                 <a:solidFill>
                   <a:srgbClr val="26262F"/>
                 </a:solidFill>
@@ -14522,7 +14546,7 @@
               </a:rPr>
               <a:t>Anyone can open their browser's developer tools and read, and even change, your client-side JavaScript. Any check that truly matters -- "is this password correct?", "does this user own this post?" -- must be done AGAIN on the server, which the user cannot tamper with.</a:t>
             </a:r>
-            <a:endParaRPr lang="en-US" sz="1250" dirty="0"/>
+            <a:endParaRPr lang="en-US" sz="2800" dirty="0"/>
           </a:p>
         </p:txBody>
       </p:sp>
@@ -17215,7 +17239,7 @@
         <p:spPr>
           <a:xfrm>
             <a:off x="640080" y="1965960"/>
-            <a:ext cx="10911535" cy="1920240"/>
+            <a:ext cx="10911535" cy="3657600"/>
           </a:xfrm>
           <a:prstGeom prst="roundRect">
             <a:avLst>
@@ -17246,7 +17270,7 @@
         <p:spPr>
           <a:xfrm>
             <a:off x="868680" y="2103120"/>
-            <a:ext cx="10454335" cy="274320"/>
+            <a:ext cx="10454335" cy="400000"/>
           </a:xfrm>
           <a:prstGeom prst="rect">
             <a:avLst/>
@@ -17262,7 +17286,7 @@
               <a:buNone/>
             </a:pPr>
             <a:r>
-              <a:rPr lang="en-US" sz="1000" b="1" spc="200" kern="0" dirty="0">
+              <a:rPr lang="en-US" sz="1800" b="1" spc="200" kern="0" dirty="0">
                 <a:solidFill>
                   <a:srgbClr val="33459E"/>
                 </a:solidFill>
@@ -17272,7 +17296,7 @@
               </a:rPr>
               <a:t>NOTE</a:t>
             </a:r>
-            <a:endParaRPr lang="en-US" sz="1000" dirty="0"/>
+            <a:endParaRPr lang="en-US" sz="1800" dirty="0"/>
           </a:p>
         </p:txBody>
       </p:sp>
@@ -17284,24 +17308,24 @@
         </p:nvSpPr>
         <p:spPr>
           <a:xfrm>
-            <a:off x="868680" y="2404872"/>
-            <a:ext cx="10454335" cy="1325880"/>
-          </a:xfrm>
-          <a:prstGeom prst="rect">
-            <a:avLst/>
-          </a:prstGeom>
-          <a:noFill/>
-          <a:ln/>
-        </p:spPr>
-        <p:txBody>
-          <a:bodyPr wrap="square" lIns="0" tIns="0" rIns="0" bIns="0" rtlCol="0" anchor="t"/>
+            <a:off x="868680" y="2795960"/>
+            <a:ext cx="10454335" cy="2800000"/>
+          </a:xfrm>
+          <a:prstGeom prst="rect">
+            <a:avLst/>
+          </a:prstGeom>
+          <a:noFill/>
+          <a:ln/>
+        </p:spPr>
+        <p:txBody>
+          <a:bodyPr wrap="square" lIns="0" tIns="0" rIns="0" bIns="0" rtlCol="0" anchor="ctr"/>
           <a:lstStyle/>
           <a:p>
             <a:pPr indent="0" marL="0">
               <a:buNone/>
             </a:pPr>
             <a:r>
-              <a:rPr lang="en-US" sz="1250" dirty="0">
+              <a:rPr lang="en-US" sz="2800" dirty="0">
                 <a:solidFill>
                   <a:srgbClr val="26262F"/>
                 </a:solidFill>
@@ -17311,7 +17335,7 @@
               </a:rPr>
               <a:t>JavaScript, as a language, only defines variables, functions, loops, objects. It does NOT define how to read a file or open a network connection -- those abilities are added by whatever environment runs the code. Node.js deliberately leaves out browser-only things like the DOM.</a:t>
             </a:r>
-            <a:endParaRPr lang="en-US" sz="1250" dirty="0"/>
+            <a:endParaRPr lang="en-US" sz="2800" dirty="0"/>
           </a:p>
         </p:txBody>
       </p:sp>
